--- a/5조_발표자료.pptx
+++ b/5조_발표자료.pptx
@@ -5,7 +5,7 @@
     <p:sldMasterId id="2147483648" r:id="rId1"/>
   </p:sldMasterIdLst>
   <p:notesMasterIdLst>
-    <p:notesMasterId r:id="rId18"/>
+    <p:notesMasterId r:id="rId17"/>
   </p:notesMasterIdLst>
   <p:sldIdLst>
     <p:sldId id="256" r:id="rId2"/>
@@ -22,8 +22,7 @@
     <p:sldId id="270" r:id="rId13"/>
     <p:sldId id="272" r:id="rId14"/>
     <p:sldId id="263" r:id="rId15"/>
-    <p:sldId id="273" r:id="rId16"/>
-    <p:sldId id="266" r:id="rId17"/>
+    <p:sldId id="266" r:id="rId16"/>
   </p:sldIdLst>
   <p:sldSz cx="9144000" cy="5143500" type="screen16x9"/>
   <p:notesSz cx="5143500" cy="9144000"/>
@@ -963,140 +962,6 @@
         <p:cNvPr id="1" name="">
           <a:extLst>
             <a:ext uri="{FF2B5EF4-FFF2-40B4-BE49-F238E27FC236}">
-              <a16:creationId xmlns:a16="http://schemas.microsoft.com/office/drawing/2014/main" id="{6CAE71F4-3E16-73BF-DC51-F05A12C2A774}"/>
-            </a:ext>
-          </a:extLst>
-        </p:cNvPr>
-        <p:cNvGrpSpPr/>
-        <p:nvPr/>
-      </p:nvGrpSpPr>
-      <p:grpSpPr>
-        <a:xfrm>
-          <a:off x="0" y="0"/>
-          <a:ext cx="0" cy="0"/>
-          <a:chOff x="0" y="0"/>
-          <a:chExt cx="0" cy="0"/>
-        </a:xfrm>
-      </p:grpSpPr>
-      <p:sp>
-        <p:nvSpPr>
-          <p:cNvPr id="2" name="Slide Image Placeholder 1">
-            <a:extLst>
-              <a:ext uri="{FF2B5EF4-FFF2-40B4-BE49-F238E27FC236}">
-                <a16:creationId xmlns:a16="http://schemas.microsoft.com/office/drawing/2014/main" id="{526621F9-E364-60B1-87E1-FF96FD0AD7F5}"/>
-              </a:ext>
-            </a:extLst>
-          </p:cNvPr>
-          <p:cNvSpPr>
-            <a:spLocks noGrp="1" noRot="1" noChangeAspect="1"/>
-          </p:cNvSpPr>
-          <p:nvPr>
-            <p:ph type="sldImg"/>
-          </p:nvPr>
-        </p:nvSpPr>
-        <p:spPr/>
-      </p:sp>
-      <p:sp>
-        <p:nvSpPr>
-          <p:cNvPr id="3" name="Notes Placeholder 2">
-            <a:extLst>
-              <a:ext uri="{FF2B5EF4-FFF2-40B4-BE49-F238E27FC236}">
-                <a16:creationId xmlns:a16="http://schemas.microsoft.com/office/drawing/2014/main" id="{06B8D1AA-BC27-4FDD-FB40-F57C7610EB2D}"/>
-              </a:ext>
-            </a:extLst>
-          </p:cNvPr>
-          <p:cNvSpPr>
-            <a:spLocks noGrp="1"/>
-          </p:cNvSpPr>
-          <p:nvPr>
-            <p:ph type="body" idx="1"/>
-          </p:nvPr>
-        </p:nvSpPr>
-        <p:spPr/>
-        <p:txBody>
-          <a:bodyPr/>
-          <a:lstStyle/>
-          <a:p>
-            <a:r>
-              <a:rPr lang="ko-KR" altLang="en-US" dirty="0"/>
-              <a:t>정리하면 자동화된 수집과 추출을 통하여 주요한 업무 정보들을 추출하고</a:t>
-            </a:r>
-            <a:endParaRPr lang="en-US" altLang="ko-KR" dirty="0"/>
-          </a:p>
-          <a:p>
-            <a:r>
-              <a:rPr lang="ko-KR" altLang="en-US" dirty="0"/>
-              <a:t>이를 통해 업무요청 누락과 반복작업을 줄임으로써 업무효율성을</a:t>
-            </a:r>
-            <a:endParaRPr lang="en-US" altLang="ko-KR" dirty="0"/>
-          </a:p>
-          <a:p>
-            <a:r>
-              <a:rPr lang="ko-KR" altLang="en-US" dirty="0"/>
-              <a:t>향상시킬 수 있다고 보면 될 것 같습니다</a:t>
-            </a:r>
-            <a:r>
-              <a:rPr lang="en-US" altLang="ko-KR" dirty="0"/>
-              <a:t>.</a:t>
-            </a:r>
-            <a:r>
-              <a:rPr lang="ko-KR" altLang="en-US" dirty="0"/>
-              <a:t> </a:t>
-            </a:r>
-            <a:endParaRPr lang="en-US" altLang="ko-KR" dirty="0"/>
-          </a:p>
-        </p:txBody>
-      </p:sp>
-      <p:sp>
-        <p:nvSpPr>
-          <p:cNvPr id="4" name="Slide Number Placeholder 3">
-            <a:extLst>
-              <a:ext uri="{FF2B5EF4-FFF2-40B4-BE49-F238E27FC236}">
-                <a16:creationId xmlns:a16="http://schemas.microsoft.com/office/drawing/2014/main" id="{153517D4-ED73-5B34-DCC0-18D62A021D65}"/>
-              </a:ext>
-            </a:extLst>
-          </p:cNvPr>
-          <p:cNvSpPr>
-            <a:spLocks noGrp="1"/>
-          </p:cNvSpPr>
-          <p:nvPr>
-            <p:ph type="sldNum" sz="quarter" idx="10"/>
-          </p:nvPr>
-        </p:nvSpPr>
-        <p:spPr/>
-        <p:txBody>
-          <a:bodyPr/>
-          <a:lstStyle/>
-          <a:p>
-            <a:fld id="{F7021451-1387-4CA6-816F-3879F97B5CBC}" type="slidenum">
-              <a:rPr lang="en-US"/>
-              <a:t>15</a:t>
-            </a:fld>
-            <a:endParaRPr lang="en-US"/>
-          </a:p>
-        </p:txBody>
-      </p:sp>
-    </p:spTree>
-    <p:extLst>
-      <p:ext uri="{BB962C8B-B14F-4D97-AF65-F5344CB8AC3E}">
-        <p14:creationId xmlns:p14="http://schemas.microsoft.com/office/powerpoint/2010/main" val="98296279"/>
-      </p:ext>
-    </p:extLst>
-  </p:cSld>
-  <p:clrMapOvr>
-    <a:masterClrMapping/>
-  </p:clrMapOvr>
-</p:notes>
-</file>
-
-<file path=ppt/notesSlides/notesSlide16.xml><?xml version="1.0" encoding="utf-8"?>
-<p:notes xmlns:a="http://schemas.openxmlformats.org/drawingml/2006/main" xmlns:r="http://schemas.openxmlformats.org/officeDocument/2006/relationships" xmlns:p="http://schemas.openxmlformats.org/presentationml/2006/main">
-  <p:cSld>
-    <p:spTree>
-      <p:nvGrpSpPr>
-        <p:cNvPr id="1" name="">
-          <a:extLst>
-            <a:ext uri="{FF2B5EF4-FFF2-40B4-BE49-F238E27FC236}">
               <a16:creationId xmlns:a16="http://schemas.microsoft.com/office/drawing/2014/main" id="{BA822CFB-8646-C843-7F15-F825C6600C63}"/>
             </a:ext>
           </a:extLst>
@@ -1178,7 +1043,7 @@
           <a:p>
             <a:fld id="{F7021451-1387-4CA6-816F-3879F97B5CBC}" type="slidenum">
               <a:rPr lang="en-US"/>
-              <a:t>16</a:t>
+              <a:t>15</a:t>
             </a:fld>
             <a:endParaRPr lang="en-US"/>
           </a:p>
@@ -3293,7 +3158,7 @@
                   <a:srgbClr val="64748B"/>
                 </a:solidFill>
               </a:rPr>
-              <a:t>8  /  14</a:t>
+              <a:t>8  /  13</a:t>
             </a:r>
             <a:endParaRPr lang="en-US" sz="1000" dirty="0"/>
           </a:p>
@@ -4227,7 +4092,7 @@
                   <a:srgbClr val="64748B"/>
                 </a:solidFill>
               </a:rPr>
-              <a:t>9  /  14</a:t>
+              <a:t>9  /  13</a:t>
             </a:r>
             <a:endParaRPr lang="en-US" sz="1000" dirty="0"/>
           </a:p>
@@ -5143,7 +5008,7 @@
                   <a:srgbClr val="64748B"/>
                 </a:solidFill>
               </a:rPr>
-              <a:t>10  /  14</a:t>
+              <a:t>10  /  13</a:t>
             </a:r>
             <a:endParaRPr lang="en-US" sz="1000" dirty="0"/>
           </a:p>
@@ -5867,7 +5732,7 @@
                   <a:srgbClr val="64748B"/>
                 </a:solidFill>
               </a:rPr>
-              <a:t>11  /  14</a:t>
+              <a:t>11  /  13</a:t>
             </a:r>
             <a:endParaRPr lang="en-US" sz="1000" dirty="0"/>
           </a:p>
@@ -6352,7 +6217,7 @@
                   <a:srgbClr val="64748B"/>
                 </a:solidFill>
               </a:rPr>
-              <a:t>12  /  14</a:t>
+              <a:t>12  /  13</a:t>
             </a:r>
             <a:endParaRPr lang="en-US" sz="1000" dirty="0"/>
           </a:p>
@@ -7559,2672 +7424,6 @@
 </file>
 
 <file path=ppt/slides/slide15.xml><?xml version="1.0" encoding="utf-8"?>
-<p:sld xmlns:a="http://schemas.openxmlformats.org/drawingml/2006/main" xmlns:r="http://schemas.openxmlformats.org/officeDocument/2006/relationships" xmlns:p="http://schemas.openxmlformats.org/presentationml/2006/main">
-  <p:cSld>
-    <p:bg>
-      <p:bgPr>
-        <a:solidFill>
-          <a:srgbClr val="F5F7FA"/>
-        </a:solidFill>
-        <a:effectLst/>
-      </p:bgPr>
-    </p:bg>
-    <p:spTree>
-      <p:nvGrpSpPr>
-        <p:cNvPr id="1" name="">
-          <a:extLst>
-            <a:ext uri="{FF2B5EF4-FFF2-40B4-BE49-F238E27FC236}">
-              <a16:creationId xmlns:a16="http://schemas.microsoft.com/office/drawing/2014/main" id="{86F3E5E2-3A29-2318-4962-D0EDCD9ED66F}"/>
-            </a:ext>
-          </a:extLst>
-        </p:cNvPr>
-        <p:cNvGrpSpPr/>
-        <p:nvPr/>
-      </p:nvGrpSpPr>
-      <p:grpSpPr>
-        <a:xfrm>
-          <a:off x="0" y="0"/>
-          <a:ext cx="0" cy="0"/>
-          <a:chOff x="0" y="0"/>
-          <a:chExt cx="0" cy="0"/>
-        </a:xfrm>
-      </p:grpSpPr>
-      <p:sp>
-        <p:nvSpPr>
-          <p:cNvPr id="2" name="Rectangle 1"/>
-          <p:cNvSpPr/>
-          <p:nvPr/>
-        </p:nvSpPr>
-        <p:spPr>
-          <a:xfrm>
-            <a:off x="0" y="0"/>
-            <a:ext cx="9144000" cy="749808"/>
-          </a:xfrm>
-          <a:prstGeom prst="rect">
-            <a:avLst/>
-          </a:prstGeom>
-          <a:solidFill>
-            <a:srgbClr val="1B2A4A"/>
-          </a:solidFill>
-          <a:ln>
-            <a:noFill/>
-          </a:ln>
-        </p:spPr>
-        <p:style>
-          <a:lnRef idx="1">
-            <a:schemeClr val="accent1"/>
-          </a:lnRef>
-          <a:fillRef idx="3">
-            <a:schemeClr val="accent1"/>
-          </a:fillRef>
-          <a:effectRef idx="2">
-            <a:schemeClr val="accent1"/>
-          </a:effectRef>
-          <a:fontRef idx="minor">
-            <a:schemeClr val="lt1"/>
-          </a:fontRef>
-        </p:style>
-        <p:txBody>
-          <a:bodyPr rtlCol="0" anchor="ctr"/>
-          <a:lstStyle/>
-          <a:p>
-            <a:pPr algn="ctr"/>
-            <a:endParaRPr/>
-          </a:p>
-        </p:txBody>
-      </p:sp>
-      <p:sp>
-        <p:nvSpPr>
-          <p:cNvPr id="3" name="Rectangle 2"/>
-          <p:cNvSpPr/>
-          <p:nvPr/>
-        </p:nvSpPr>
-        <p:spPr>
-          <a:xfrm>
-            <a:off x="347472" y="137160"/>
-            <a:ext cx="566928" cy="475488"/>
-          </a:xfrm>
-          <a:prstGeom prst="rect">
-            <a:avLst/>
-          </a:prstGeom>
-          <a:solidFill>
-            <a:srgbClr val="DC2626"/>
-          </a:solidFill>
-          <a:ln>
-            <a:noFill/>
-          </a:ln>
-        </p:spPr>
-        <p:style>
-          <a:lnRef idx="1">
-            <a:schemeClr val="accent1"/>
-          </a:lnRef>
-          <a:fillRef idx="3">
-            <a:schemeClr val="accent1"/>
-          </a:fillRef>
-          <a:effectRef idx="2">
-            <a:schemeClr val="accent1"/>
-          </a:effectRef>
-          <a:fontRef idx="minor">
-            <a:schemeClr val="lt1"/>
-          </a:fontRef>
-        </p:style>
-        <p:txBody>
-          <a:bodyPr wrap="square" rtlCol="0" anchor="ctr"/>
-          <a:lstStyle/>
-          <a:p>
-            <a:pPr algn="ctr"/>
-            <a:r>
-              <a:rPr sz="1500" b="1">
-                <a:solidFill>
-                  <a:srgbClr val="FFFFFF"/>
-                </a:solidFill>
-              </a:rPr>
-              <a:t>08</a:t>
-            </a:r>
-          </a:p>
-        </p:txBody>
-      </p:sp>
-      <p:sp>
-        <p:nvSpPr>
-          <p:cNvPr id="4" name="TextBox 3"/>
-          <p:cNvSpPr txBox="1"/>
-          <p:nvPr/>
-        </p:nvSpPr>
-        <p:spPr>
-          <a:xfrm>
-            <a:off x="1078992" y="54864"/>
-            <a:ext cx="7818120" cy="640080"/>
-          </a:xfrm>
-          <a:prstGeom prst="rect">
-            <a:avLst/>
-          </a:prstGeom>
-          <a:noFill/>
-        </p:spPr>
-        <p:txBody>
-          <a:bodyPr wrap="square">
-            <a:spAutoFit/>
-          </a:bodyPr>
-          <a:lstStyle/>
-          <a:p>
-            <a:pPr algn="l"/>
-            <a:r>
-              <a:rPr sz="2000" b="1" dirty="0" err="1">
-                <a:solidFill>
-                  <a:srgbClr val="FFFFFF"/>
-                </a:solidFill>
-              </a:rPr>
-              <a:t>한계</a:t>
-            </a:r>
-            <a:r>
-              <a:rPr sz="2000" b="1" dirty="0">
-                <a:solidFill>
-                  <a:srgbClr val="FFFFFF"/>
-                </a:solidFill>
-              </a:rPr>
-              <a:t> </a:t>
-            </a:r>
-            <a:r>
-              <a:rPr lang="ko-KR" altLang="en-US" sz="2000" b="1" dirty="0">
-                <a:solidFill>
-                  <a:srgbClr val="FFFFFF"/>
-                </a:solidFill>
-              </a:rPr>
-              <a:t>및</a:t>
-            </a:r>
-            <a:r>
-              <a:rPr sz="2000" b="1" dirty="0">
-                <a:solidFill>
-                  <a:srgbClr val="FFFFFF"/>
-                </a:solidFill>
-              </a:rPr>
-              <a:t> </a:t>
-            </a:r>
-            <a:r>
-              <a:rPr sz="2000" b="1" dirty="0" err="1">
-                <a:solidFill>
-                  <a:srgbClr val="FFFFFF"/>
-                </a:solidFill>
-              </a:rPr>
-              <a:t>개선사항</a:t>
-            </a:r>
-            <a:endParaRPr sz="2000" b="1" dirty="0">
-              <a:solidFill>
-                <a:srgbClr val="FFFFFF"/>
-              </a:solidFill>
-            </a:endParaRPr>
-          </a:p>
-        </p:txBody>
-      </p:sp>
-      <p:sp>
-        <p:nvSpPr>
-          <p:cNvPr id="5" name="Rectangle 4"/>
-          <p:cNvSpPr/>
-          <p:nvPr/>
-        </p:nvSpPr>
-        <p:spPr>
-          <a:xfrm>
-            <a:off x="0" y="749808"/>
-            <a:ext cx="9144000" cy="329184"/>
-          </a:xfrm>
-          <a:prstGeom prst="rect">
-            <a:avLst/>
-          </a:prstGeom>
-          <a:solidFill>
-            <a:srgbClr val="FFF1F2"/>
-          </a:solidFill>
-          <a:ln>
-            <a:noFill/>
-          </a:ln>
-        </p:spPr>
-        <p:style>
-          <a:lnRef idx="1">
-            <a:schemeClr val="accent1"/>
-          </a:lnRef>
-          <a:fillRef idx="3">
-            <a:schemeClr val="accent1"/>
-          </a:fillRef>
-          <a:effectRef idx="2">
-            <a:schemeClr val="accent1"/>
-          </a:effectRef>
-          <a:fontRef idx="minor">
-            <a:schemeClr val="lt1"/>
-          </a:fontRef>
-        </p:style>
-        <p:txBody>
-          <a:bodyPr rtlCol="0" anchor="ctr"/>
-          <a:lstStyle/>
-          <a:p>
-            <a:pPr algn="ctr"/>
-            <a:endParaRPr/>
-          </a:p>
-        </p:txBody>
-      </p:sp>
-      <p:sp>
-        <p:nvSpPr>
-          <p:cNvPr id="6" name="Rectangle 5"/>
-          <p:cNvSpPr/>
-          <p:nvPr/>
-        </p:nvSpPr>
-        <p:spPr>
-          <a:xfrm>
-            <a:off x="0" y="749808"/>
-            <a:ext cx="45720" cy="329184"/>
-          </a:xfrm>
-          <a:prstGeom prst="rect">
-            <a:avLst/>
-          </a:prstGeom>
-          <a:solidFill>
-            <a:srgbClr val="DC2626"/>
-          </a:solidFill>
-          <a:ln>
-            <a:noFill/>
-          </a:ln>
-        </p:spPr>
-        <p:style>
-          <a:lnRef idx="1">
-            <a:schemeClr val="accent1"/>
-          </a:lnRef>
-          <a:fillRef idx="3">
-            <a:schemeClr val="accent1"/>
-          </a:fillRef>
-          <a:effectRef idx="2">
-            <a:schemeClr val="accent1"/>
-          </a:effectRef>
-          <a:fontRef idx="minor">
-            <a:schemeClr val="lt1"/>
-          </a:fontRef>
-        </p:style>
-        <p:txBody>
-          <a:bodyPr rtlCol="0" anchor="ctr"/>
-          <a:lstStyle/>
-          <a:p>
-            <a:pPr algn="ctr"/>
-            <a:endParaRPr/>
-          </a:p>
-        </p:txBody>
-      </p:sp>
-      <p:sp>
-        <p:nvSpPr>
-          <p:cNvPr id="7" name="TextBox 6"/>
-          <p:cNvSpPr txBox="1"/>
-          <p:nvPr/>
-        </p:nvSpPr>
-        <p:spPr>
-          <a:xfrm>
-            <a:off x="201168" y="777240"/>
-            <a:ext cx="8595360" cy="274320"/>
-          </a:xfrm>
-          <a:prstGeom prst="rect">
-            <a:avLst/>
-          </a:prstGeom>
-          <a:noFill/>
-        </p:spPr>
-        <p:txBody>
-          <a:bodyPr wrap="square">
-            <a:spAutoFit/>
-          </a:bodyPr>
-          <a:lstStyle/>
-          <a:p>
-            <a:pPr algn="l"/>
-            <a:r>
-              <a:rPr sz="1100" b="0">
-                <a:solidFill>
-                  <a:srgbClr val="64748B"/>
-                </a:solidFill>
-              </a:rPr>
-              <a:t>현재 시스템의 구현 제약과 향후 발전 방향</a:t>
-            </a:r>
-          </a:p>
-        </p:txBody>
-      </p:sp>
-      <p:sp>
-        <p:nvSpPr>
-          <p:cNvPr id="8" name="Rectangle 7"/>
-          <p:cNvSpPr/>
-          <p:nvPr/>
-        </p:nvSpPr>
-        <p:spPr>
-          <a:xfrm>
-            <a:off x="320040" y="1170432"/>
-            <a:ext cx="4114800" cy="329184"/>
-          </a:xfrm>
-          <a:prstGeom prst="rect">
-            <a:avLst/>
-          </a:prstGeom>
-          <a:solidFill>
-            <a:srgbClr val="FEE2E2"/>
-          </a:solidFill>
-          <a:ln>
-            <a:noFill/>
-          </a:ln>
-        </p:spPr>
-        <p:style>
-          <a:lnRef idx="1">
-            <a:schemeClr val="accent1"/>
-          </a:lnRef>
-          <a:fillRef idx="3">
-            <a:schemeClr val="accent1"/>
-          </a:fillRef>
-          <a:effectRef idx="2">
-            <a:schemeClr val="accent1"/>
-          </a:effectRef>
-          <a:fontRef idx="minor">
-            <a:schemeClr val="lt1"/>
-          </a:fontRef>
-        </p:style>
-        <p:txBody>
-          <a:bodyPr rtlCol="0" anchor="ctr"/>
-          <a:lstStyle/>
-          <a:p>
-            <a:pPr algn="ctr"/>
-            <a:endParaRPr/>
-          </a:p>
-        </p:txBody>
-      </p:sp>
-      <p:sp>
-        <p:nvSpPr>
-          <p:cNvPr id="9" name="Rectangle 8"/>
-          <p:cNvSpPr/>
-          <p:nvPr/>
-        </p:nvSpPr>
-        <p:spPr>
-          <a:xfrm>
-            <a:off x="320040" y="1170432"/>
-            <a:ext cx="45720" cy="329184"/>
-          </a:xfrm>
-          <a:prstGeom prst="rect">
-            <a:avLst/>
-          </a:prstGeom>
-          <a:solidFill>
-            <a:srgbClr val="DC2626"/>
-          </a:solidFill>
-          <a:ln>
-            <a:noFill/>
-          </a:ln>
-        </p:spPr>
-        <p:style>
-          <a:lnRef idx="1">
-            <a:schemeClr val="accent1"/>
-          </a:lnRef>
-          <a:fillRef idx="3">
-            <a:schemeClr val="accent1"/>
-          </a:fillRef>
-          <a:effectRef idx="2">
-            <a:schemeClr val="accent1"/>
-          </a:effectRef>
-          <a:fontRef idx="minor">
-            <a:schemeClr val="lt1"/>
-          </a:fontRef>
-        </p:style>
-        <p:txBody>
-          <a:bodyPr rtlCol="0" anchor="ctr"/>
-          <a:lstStyle/>
-          <a:p>
-            <a:pPr algn="ctr"/>
-            <a:endParaRPr/>
-          </a:p>
-        </p:txBody>
-      </p:sp>
-      <p:sp>
-        <p:nvSpPr>
-          <p:cNvPr id="10" name="TextBox 9"/>
-          <p:cNvSpPr txBox="1"/>
-          <p:nvPr/>
-        </p:nvSpPr>
-        <p:spPr>
-          <a:xfrm>
-            <a:off x="502920" y="1207008"/>
-            <a:ext cx="3840480" cy="256032"/>
-          </a:xfrm>
-          <a:prstGeom prst="rect">
-            <a:avLst/>
-          </a:prstGeom>
-          <a:noFill/>
-        </p:spPr>
-        <p:txBody>
-          <a:bodyPr wrap="square">
-            <a:spAutoFit/>
-          </a:bodyPr>
-          <a:lstStyle/>
-          <a:p>
-            <a:pPr algn="l"/>
-            <a:r>
-              <a:rPr sz="1100" b="1">
-                <a:solidFill>
-                  <a:srgbClr val="B91C1C"/>
-                </a:solidFill>
-              </a:rPr>
-              <a:t>⚠  현재 한계  (구현 범위 기준)</a:t>
-            </a:r>
-          </a:p>
-        </p:txBody>
-      </p:sp>
-      <p:sp>
-        <p:nvSpPr>
-          <p:cNvPr id="11" name="Rectangle 10"/>
-          <p:cNvSpPr/>
-          <p:nvPr/>
-        </p:nvSpPr>
-        <p:spPr>
-          <a:xfrm>
-            <a:off x="4709160" y="1170432"/>
-            <a:ext cx="4114800" cy="329184"/>
-          </a:xfrm>
-          <a:prstGeom prst="rect">
-            <a:avLst/>
-          </a:prstGeom>
-          <a:solidFill>
-            <a:srgbClr val="DCFCE7"/>
-          </a:solidFill>
-          <a:ln>
-            <a:noFill/>
-          </a:ln>
-        </p:spPr>
-        <p:style>
-          <a:lnRef idx="1">
-            <a:schemeClr val="accent1"/>
-          </a:lnRef>
-          <a:fillRef idx="3">
-            <a:schemeClr val="accent1"/>
-          </a:fillRef>
-          <a:effectRef idx="2">
-            <a:schemeClr val="accent1"/>
-          </a:effectRef>
-          <a:fontRef idx="minor">
-            <a:schemeClr val="lt1"/>
-          </a:fontRef>
-        </p:style>
-        <p:txBody>
-          <a:bodyPr rtlCol="0" anchor="ctr"/>
-          <a:lstStyle/>
-          <a:p>
-            <a:pPr algn="ctr"/>
-            <a:endParaRPr/>
-          </a:p>
-        </p:txBody>
-      </p:sp>
-      <p:sp>
-        <p:nvSpPr>
-          <p:cNvPr id="12" name="Rectangle 11"/>
-          <p:cNvSpPr/>
-          <p:nvPr/>
-        </p:nvSpPr>
-        <p:spPr>
-          <a:xfrm>
-            <a:off x="4709160" y="1170432"/>
-            <a:ext cx="45720" cy="329184"/>
-          </a:xfrm>
-          <a:prstGeom prst="rect">
-            <a:avLst/>
-          </a:prstGeom>
-          <a:solidFill>
-            <a:srgbClr val="16A34A"/>
-          </a:solidFill>
-          <a:ln>
-            <a:noFill/>
-          </a:ln>
-        </p:spPr>
-        <p:style>
-          <a:lnRef idx="1">
-            <a:schemeClr val="accent1"/>
-          </a:lnRef>
-          <a:fillRef idx="3">
-            <a:schemeClr val="accent1"/>
-          </a:fillRef>
-          <a:effectRef idx="2">
-            <a:schemeClr val="accent1"/>
-          </a:effectRef>
-          <a:fontRef idx="minor">
-            <a:schemeClr val="lt1"/>
-          </a:fontRef>
-        </p:style>
-        <p:txBody>
-          <a:bodyPr rtlCol="0" anchor="ctr"/>
-          <a:lstStyle/>
-          <a:p>
-            <a:pPr algn="ctr"/>
-            <a:endParaRPr/>
-          </a:p>
-        </p:txBody>
-      </p:sp>
-      <p:sp>
-        <p:nvSpPr>
-          <p:cNvPr id="13" name="TextBox 12"/>
-          <p:cNvSpPr txBox="1"/>
-          <p:nvPr/>
-        </p:nvSpPr>
-        <p:spPr>
-          <a:xfrm>
-            <a:off x="4892040" y="1207008"/>
-            <a:ext cx="3840480" cy="256032"/>
-          </a:xfrm>
-          <a:prstGeom prst="rect">
-            <a:avLst/>
-          </a:prstGeom>
-          <a:noFill/>
-        </p:spPr>
-        <p:txBody>
-          <a:bodyPr wrap="square">
-            <a:spAutoFit/>
-          </a:bodyPr>
-          <a:lstStyle/>
-          <a:p>
-            <a:pPr algn="l"/>
-            <a:r>
-              <a:rPr sz="1100" b="1">
-                <a:solidFill>
-                  <a:srgbClr val="15803D"/>
-                </a:solidFill>
-              </a:rPr>
-              <a:t>✓  개선 방향  (향후 적용 계획)</a:t>
-            </a:r>
-          </a:p>
-        </p:txBody>
-      </p:sp>
-      <p:sp>
-        <p:nvSpPr>
-          <p:cNvPr id="14" name="Rectangle 13"/>
-          <p:cNvSpPr/>
-          <p:nvPr/>
-        </p:nvSpPr>
-        <p:spPr>
-          <a:xfrm>
-            <a:off x="4498848" y="1133856"/>
-            <a:ext cx="54864" cy="3767328"/>
-          </a:xfrm>
-          <a:prstGeom prst="rect">
-            <a:avLst/>
-          </a:prstGeom>
-          <a:solidFill>
-            <a:srgbClr val="E2E8F0"/>
-          </a:solidFill>
-          <a:ln>
-            <a:noFill/>
-          </a:ln>
-        </p:spPr>
-        <p:style>
-          <a:lnRef idx="1">
-            <a:schemeClr val="accent1"/>
-          </a:lnRef>
-          <a:fillRef idx="3">
-            <a:schemeClr val="accent1"/>
-          </a:fillRef>
-          <a:effectRef idx="2">
-            <a:schemeClr val="accent1"/>
-          </a:effectRef>
-          <a:fontRef idx="minor">
-            <a:schemeClr val="lt1"/>
-          </a:fontRef>
-        </p:style>
-        <p:txBody>
-          <a:bodyPr rtlCol="0" anchor="ctr"/>
-          <a:lstStyle/>
-          <a:p>
-            <a:pPr algn="ctr"/>
-            <a:endParaRPr/>
-          </a:p>
-        </p:txBody>
-      </p:sp>
-      <p:sp>
-        <p:nvSpPr>
-          <p:cNvPr id="15" name="Rectangle 14"/>
-          <p:cNvSpPr/>
-          <p:nvPr/>
-        </p:nvSpPr>
-        <p:spPr>
-          <a:xfrm>
-            <a:off x="320040" y="1609344"/>
-            <a:ext cx="4114800" cy="621792"/>
-          </a:xfrm>
-          <a:prstGeom prst="rect">
-            <a:avLst/>
-          </a:prstGeom>
-          <a:solidFill>
-            <a:srgbClr val="FFF1F2"/>
-          </a:solidFill>
-          <a:ln>
-            <a:noFill/>
-          </a:ln>
-        </p:spPr>
-        <p:style>
-          <a:lnRef idx="1">
-            <a:schemeClr val="accent1"/>
-          </a:lnRef>
-          <a:fillRef idx="3">
-            <a:schemeClr val="accent1"/>
-          </a:fillRef>
-          <a:effectRef idx="2">
-            <a:schemeClr val="accent1"/>
-          </a:effectRef>
-          <a:fontRef idx="minor">
-            <a:schemeClr val="lt1"/>
-          </a:fontRef>
-        </p:style>
-        <p:txBody>
-          <a:bodyPr rtlCol="0" anchor="ctr"/>
-          <a:lstStyle/>
-          <a:p>
-            <a:pPr algn="ctr"/>
-            <a:endParaRPr/>
-          </a:p>
-        </p:txBody>
-      </p:sp>
-      <p:sp>
-        <p:nvSpPr>
-          <p:cNvPr id="16" name="Rectangle 15"/>
-          <p:cNvSpPr/>
-          <p:nvPr/>
-        </p:nvSpPr>
-        <p:spPr>
-          <a:xfrm>
-            <a:off x="320040" y="1609344"/>
-            <a:ext cx="45720" cy="621792"/>
-          </a:xfrm>
-          <a:prstGeom prst="rect">
-            <a:avLst/>
-          </a:prstGeom>
-          <a:solidFill>
-            <a:srgbClr val="991B1B"/>
-          </a:solidFill>
-          <a:ln>
-            <a:noFill/>
-          </a:ln>
-        </p:spPr>
-        <p:style>
-          <a:lnRef idx="1">
-            <a:schemeClr val="accent1"/>
-          </a:lnRef>
-          <a:fillRef idx="3">
-            <a:schemeClr val="accent1"/>
-          </a:fillRef>
-          <a:effectRef idx="2">
-            <a:schemeClr val="accent1"/>
-          </a:effectRef>
-          <a:fontRef idx="minor">
-            <a:schemeClr val="lt1"/>
-          </a:fontRef>
-        </p:style>
-        <p:txBody>
-          <a:bodyPr rtlCol="0" anchor="ctr"/>
-          <a:lstStyle/>
-          <a:p>
-            <a:pPr algn="ctr"/>
-            <a:endParaRPr/>
-          </a:p>
-        </p:txBody>
-      </p:sp>
-      <p:sp>
-        <p:nvSpPr>
-          <p:cNvPr id="17" name="TextBox 16"/>
-          <p:cNvSpPr txBox="1"/>
-          <p:nvPr/>
-        </p:nvSpPr>
-        <p:spPr>
-          <a:xfrm>
-            <a:off x="466344" y="1664208"/>
-            <a:ext cx="3931920" cy="219456"/>
-          </a:xfrm>
-          <a:prstGeom prst="rect">
-            <a:avLst/>
-          </a:prstGeom>
-          <a:noFill/>
-        </p:spPr>
-        <p:txBody>
-          <a:bodyPr wrap="square">
-            <a:spAutoFit/>
-          </a:bodyPr>
-          <a:lstStyle/>
-          <a:p>
-            <a:pPr algn="l"/>
-            <a:r>
-              <a:rPr sz="1000" b="1">
-                <a:solidFill>
-                  <a:srgbClr val="9F1239"/>
-                </a:solidFill>
-              </a:rPr>
-              <a:t>①  메일 처리 범위 한정</a:t>
-            </a:r>
-          </a:p>
-        </p:txBody>
-      </p:sp>
-      <p:sp>
-        <p:nvSpPr>
-          <p:cNvPr id="18" name="TextBox 17"/>
-          <p:cNvSpPr txBox="1"/>
-          <p:nvPr/>
-        </p:nvSpPr>
-        <p:spPr>
-          <a:xfrm>
-            <a:off x="466344" y="1901952"/>
-            <a:ext cx="3931920" cy="310896"/>
-          </a:xfrm>
-          <a:prstGeom prst="rect">
-            <a:avLst/>
-          </a:prstGeom>
-          <a:noFill/>
-        </p:spPr>
-        <p:txBody>
-          <a:bodyPr wrap="square">
-            <a:spAutoFit/>
-          </a:bodyPr>
-          <a:lstStyle/>
-          <a:p>
-            <a:pPr algn="l"/>
-            <a:r>
-              <a:rPr sz="850" b="0">
-                <a:solidFill>
-                  <a:srgbClr val="374151"/>
-                </a:solidFill>
-              </a:rPr>
-              <a:t>Gmail IMAP 전용 · 최근 50개 메일만 처리</a:t>
-            </a:r>
-          </a:p>
-          <a:p>
-            <a:pPr algn="l"/>
-            <a:r>
-              <a:rPr sz="850" b="0">
-                <a:solidFill>
-                  <a:srgbClr val="64748B"/>
-                </a:solidFill>
-              </a:rPr>
-              <a:t>Outlook · 네이버 등 타 서비스 미지원</a:t>
-            </a:r>
-          </a:p>
-        </p:txBody>
-      </p:sp>
-      <p:sp>
-        <p:nvSpPr>
-          <p:cNvPr id="19" name="Rectangle 18"/>
-          <p:cNvSpPr/>
-          <p:nvPr/>
-        </p:nvSpPr>
-        <p:spPr>
-          <a:xfrm>
-            <a:off x="320040" y="2281428"/>
-            <a:ext cx="4114800" cy="621792"/>
-          </a:xfrm>
-          <a:prstGeom prst="rect">
-            <a:avLst/>
-          </a:prstGeom>
-          <a:solidFill>
-            <a:srgbClr val="FFF7ED"/>
-          </a:solidFill>
-          <a:ln>
-            <a:noFill/>
-          </a:ln>
-        </p:spPr>
-        <p:style>
-          <a:lnRef idx="1">
-            <a:schemeClr val="accent1"/>
-          </a:lnRef>
-          <a:fillRef idx="3">
-            <a:schemeClr val="accent1"/>
-          </a:fillRef>
-          <a:effectRef idx="2">
-            <a:schemeClr val="accent1"/>
-          </a:effectRef>
-          <a:fontRef idx="minor">
-            <a:schemeClr val="lt1"/>
-          </a:fontRef>
-        </p:style>
-        <p:txBody>
-          <a:bodyPr rtlCol="0" anchor="ctr"/>
-          <a:lstStyle/>
-          <a:p>
-            <a:pPr algn="ctr"/>
-            <a:endParaRPr/>
-          </a:p>
-        </p:txBody>
-      </p:sp>
-      <p:sp>
-        <p:nvSpPr>
-          <p:cNvPr id="20" name="Rectangle 19"/>
-          <p:cNvSpPr/>
-          <p:nvPr/>
-        </p:nvSpPr>
-        <p:spPr>
-          <a:xfrm>
-            <a:off x="320040" y="2281428"/>
-            <a:ext cx="45720" cy="621792"/>
-          </a:xfrm>
-          <a:prstGeom prst="rect">
-            <a:avLst/>
-          </a:prstGeom>
-          <a:solidFill>
-            <a:srgbClr val="9A3412"/>
-          </a:solidFill>
-          <a:ln>
-            <a:noFill/>
-          </a:ln>
-        </p:spPr>
-        <p:style>
-          <a:lnRef idx="1">
-            <a:schemeClr val="accent1"/>
-          </a:lnRef>
-          <a:fillRef idx="3">
-            <a:schemeClr val="accent1"/>
-          </a:fillRef>
-          <a:effectRef idx="2">
-            <a:schemeClr val="accent1"/>
-          </a:effectRef>
-          <a:fontRef idx="minor">
-            <a:schemeClr val="lt1"/>
-          </a:fontRef>
-        </p:style>
-        <p:txBody>
-          <a:bodyPr rtlCol="0" anchor="ctr"/>
-          <a:lstStyle/>
-          <a:p>
-            <a:pPr algn="ctr"/>
-            <a:endParaRPr/>
-          </a:p>
-        </p:txBody>
-      </p:sp>
-      <p:sp>
-        <p:nvSpPr>
-          <p:cNvPr id="21" name="TextBox 20"/>
-          <p:cNvSpPr txBox="1"/>
-          <p:nvPr/>
-        </p:nvSpPr>
-        <p:spPr>
-          <a:xfrm>
-            <a:off x="466344" y="2336292"/>
-            <a:ext cx="3931920" cy="219456"/>
-          </a:xfrm>
-          <a:prstGeom prst="rect">
-            <a:avLst/>
-          </a:prstGeom>
-          <a:noFill/>
-        </p:spPr>
-        <p:txBody>
-          <a:bodyPr wrap="square">
-            <a:spAutoFit/>
-          </a:bodyPr>
-          <a:lstStyle/>
-          <a:p>
-            <a:pPr algn="l"/>
-            <a:r>
-              <a:rPr sz="1000" b="1">
-                <a:solidFill>
-                  <a:srgbClr val="9A3412"/>
-                </a:solidFill>
-              </a:rPr>
-              <a:t>②  구조화 양식 의존</a:t>
-            </a:r>
-          </a:p>
-        </p:txBody>
-      </p:sp>
-      <p:sp>
-        <p:nvSpPr>
-          <p:cNvPr id="22" name="TextBox 21"/>
-          <p:cNvSpPr txBox="1"/>
-          <p:nvPr/>
-        </p:nvSpPr>
-        <p:spPr>
-          <a:xfrm>
-            <a:off x="466344" y="2574036"/>
-            <a:ext cx="3931920" cy="310896"/>
-          </a:xfrm>
-          <a:prstGeom prst="rect">
-            <a:avLst/>
-          </a:prstGeom>
-          <a:noFill/>
-        </p:spPr>
-        <p:txBody>
-          <a:bodyPr wrap="square">
-            <a:spAutoFit/>
-          </a:bodyPr>
-          <a:lstStyle/>
-          <a:p>
-            <a:pPr algn="l"/>
-            <a:r>
-              <a:rPr sz="850" b="0">
-                <a:solidFill>
-                  <a:srgbClr val="374151"/>
-                </a:solidFill>
-              </a:rPr>
-              <a:t>'과업명:' 필드 기반 규칙 추출에 한정</a:t>
-            </a:r>
-          </a:p>
-          <a:p>
-            <a:pPr algn="l"/>
-            <a:r>
-              <a:rPr sz="850" b="0">
-                <a:solidFill>
-                  <a:srgbClr val="64748B"/>
-                </a:solidFill>
-              </a:rPr>
-              <a:t>비정형 자연어 메일의 업무 추출 미흡</a:t>
-            </a:r>
-          </a:p>
-        </p:txBody>
-      </p:sp>
-      <p:sp>
-        <p:nvSpPr>
-          <p:cNvPr id="23" name="Rectangle 22"/>
-          <p:cNvSpPr/>
-          <p:nvPr/>
-        </p:nvSpPr>
-        <p:spPr>
-          <a:xfrm>
-            <a:off x="320040" y="2953512"/>
-            <a:ext cx="4114800" cy="621792"/>
-          </a:xfrm>
-          <a:prstGeom prst="rect">
-            <a:avLst/>
-          </a:prstGeom>
-          <a:solidFill>
-            <a:srgbClr val="FFFBEB"/>
-          </a:solidFill>
-          <a:ln>
-            <a:noFill/>
-          </a:ln>
-        </p:spPr>
-        <p:style>
-          <a:lnRef idx="1">
-            <a:schemeClr val="accent1"/>
-          </a:lnRef>
-          <a:fillRef idx="3">
-            <a:schemeClr val="accent1"/>
-          </a:fillRef>
-          <a:effectRef idx="2">
-            <a:schemeClr val="accent1"/>
-          </a:effectRef>
-          <a:fontRef idx="minor">
-            <a:schemeClr val="lt1"/>
-          </a:fontRef>
-        </p:style>
-        <p:txBody>
-          <a:bodyPr rtlCol="0" anchor="ctr"/>
-          <a:lstStyle/>
-          <a:p>
-            <a:pPr algn="ctr"/>
-            <a:endParaRPr/>
-          </a:p>
-        </p:txBody>
-      </p:sp>
-      <p:sp>
-        <p:nvSpPr>
-          <p:cNvPr id="24" name="Rectangle 23"/>
-          <p:cNvSpPr/>
-          <p:nvPr/>
-        </p:nvSpPr>
-        <p:spPr>
-          <a:xfrm>
-            <a:off x="320040" y="2953512"/>
-            <a:ext cx="45720" cy="621792"/>
-          </a:xfrm>
-          <a:prstGeom prst="rect">
-            <a:avLst/>
-          </a:prstGeom>
-          <a:solidFill>
-            <a:srgbClr val="92400E"/>
-          </a:solidFill>
-          <a:ln>
-            <a:noFill/>
-          </a:ln>
-        </p:spPr>
-        <p:style>
-          <a:lnRef idx="1">
-            <a:schemeClr val="accent1"/>
-          </a:lnRef>
-          <a:fillRef idx="3">
-            <a:schemeClr val="accent1"/>
-          </a:fillRef>
-          <a:effectRef idx="2">
-            <a:schemeClr val="accent1"/>
-          </a:effectRef>
-          <a:fontRef idx="minor">
-            <a:schemeClr val="lt1"/>
-          </a:fontRef>
-        </p:style>
-        <p:txBody>
-          <a:bodyPr rtlCol="0" anchor="ctr"/>
-          <a:lstStyle/>
-          <a:p>
-            <a:pPr algn="ctr"/>
-            <a:endParaRPr/>
-          </a:p>
-        </p:txBody>
-      </p:sp>
-      <p:sp>
-        <p:nvSpPr>
-          <p:cNvPr id="25" name="TextBox 24"/>
-          <p:cNvSpPr txBox="1"/>
-          <p:nvPr/>
-        </p:nvSpPr>
-        <p:spPr>
-          <a:xfrm>
-            <a:off x="466344" y="3008376"/>
-            <a:ext cx="3931920" cy="219456"/>
-          </a:xfrm>
-          <a:prstGeom prst="rect">
-            <a:avLst/>
-          </a:prstGeom>
-          <a:noFill/>
-        </p:spPr>
-        <p:txBody>
-          <a:bodyPr wrap="square">
-            <a:spAutoFit/>
-          </a:bodyPr>
-          <a:lstStyle/>
-          <a:p>
-            <a:pPr algn="l"/>
-            <a:r>
-              <a:rPr sz="1000" b="1">
-                <a:solidFill>
-                  <a:srgbClr val="92400E"/>
-                </a:solidFill>
-              </a:rPr>
-              <a:t>③  마감일 파싱 한계</a:t>
-            </a:r>
-          </a:p>
-        </p:txBody>
-      </p:sp>
-      <p:sp>
-        <p:nvSpPr>
-          <p:cNvPr id="26" name="TextBox 25"/>
-          <p:cNvSpPr txBox="1"/>
-          <p:nvPr/>
-        </p:nvSpPr>
-        <p:spPr>
-          <a:xfrm>
-            <a:off x="466344" y="3246120"/>
-            <a:ext cx="3931920" cy="310896"/>
-          </a:xfrm>
-          <a:prstGeom prst="rect">
-            <a:avLst/>
-          </a:prstGeom>
-          <a:noFill/>
-        </p:spPr>
-        <p:txBody>
-          <a:bodyPr wrap="square">
-            <a:spAutoFit/>
-          </a:bodyPr>
-          <a:lstStyle/>
-          <a:p>
-            <a:pPr algn="l"/>
-            <a:r>
-              <a:rPr sz="850" b="0">
-                <a:solidFill>
-                  <a:srgbClr val="374151"/>
-                </a:solidFill>
-              </a:rPr>
-              <a:t>정규식 패턴 매칭 방식으로 처리</a:t>
-            </a:r>
-          </a:p>
-          <a:p>
-            <a:pPr algn="l"/>
-            <a:r>
-              <a:rPr sz="850" b="0">
-                <a:solidFill>
-                  <a:srgbClr val="64748B"/>
-                </a:solidFill>
-              </a:rPr>
-              <a:t>'분기말', 'Q3까지' 등 추상 표현 미인식</a:t>
-            </a:r>
-          </a:p>
-        </p:txBody>
-      </p:sp>
-      <p:sp>
-        <p:nvSpPr>
-          <p:cNvPr id="27" name="Rectangle 26"/>
-          <p:cNvSpPr/>
-          <p:nvPr/>
-        </p:nvSpPr>
-        <p:spPr>
-          <a:xfrm>
-            <a:off x="320040" y="3625596"/>
-            <a:ext cx="4114800" cy="621792"/>
-          </a:xfrm>
-          <a:prstGeom prst="rect">
-            <a:avLst/>
-          </a:prstGeom>
-          <a:solidFill>
-            <a:srgbClr val="F5F3FF"/>
-          </a:solidFill>
-          <a:ln>
-            <a:noFill/>
-          </a:ln>
-        </p:spPr>
-        <p:style>
-          <a:lnRef idx="1">
-            <a:schemeClr val="accent1"/>
-          </a:lnRef>
-          <a:fillRef idx="3">
-            <a:schemeClr val="accent1"/>
-          </a:fillRef>
-          <a:effectRef idx="2">
-            <a:schemeClr val="accent1"/>
-          </a:effectRef>
-          <a:fontRef idx="minor">
-            <a:schemeClr val="lt1"/>
-          </a:fontRef>
-        </p:style>
-        <p:txBody>
-          <a:bodyPr rtlCol="0" anchor="ctr"/>
-          <a:lstStyle/>
-          <a:p>
-            <a:pPr algn="ctr"/>
-            <a:endParaRPr/>
-          </a:p>
-        </p:txBody>
-      </p:sp>
-      <p:sp>
-        <p:nvSpPr>
-          <p:cNvPr id="28" name="Rectangle 27"/>
-          <p:cNvSpPr/>
-          <p:nvPr/>
-        </p:nvSpPr>
-        <p:spPr>
-          <a:xfrm>
-            <a:off x="320040" y="3625596"/>
-            <a:ext cx="45720" cy="621792"/>
-          </a:xfrm>
-          <a:prstGeom prst="rect">
-            <a:avLst/>
-          </a:prstGeom>
-          <a:solidFill>
-            <a:srgbClr val="6D28D9"/>
-          </a:solidFill>
-          <a:ln>
-            <a:noFill/>
-          </a:ln>
-        </p:spPr>
-        <p:style>
-          <a:lnRef idx="1">
-            <a:schemeClr val="accent1"/>
-          </a:lnRef>
-          <a:fillRef idx="3">
-            <a:schemeClr val="accent1"/>
-          </a:fillRef>
-          <a:effectRef idx="2">
-            <a:schemeClr val="accent1"/>
-          </a:effectRef>
-          <a:fontRef idx="minor">
-            <a:schemeClr val="lt1"/>
-          </a:fontRef>
-        </p:style>
-        <p:txBody>
-          <a:bodyPr rtlCol="0" anchor="ctr"/>
-          <a:lstStyle/>
-          <a:p>
-            <a:pPr algn="ctr"/>
-            <a:endParaRPr/>
-          </a:p>
-        </p:txBody>
-      </p:sp>
-      <p:sp>
-        <p:nvSpPr>
-          <p:cNvPr id="29" name="TextBox 28"/>
-          <p:cNvSpPr txBox="1"/>
-          <p:nvPr/>
-        </p:nvSpPr>
-        <p:spPr>
-          <a:xfrm>
-            <a:off x="466344" y="3680459"/>
-            <a:ext cx="3931920" cy="219456"/>
-          </a:xfrm>
-          <a:prstGeom prst="rect">
-            <a:avLst/>
-          </a:prstGeom>
-          <a:noFill/>
-        </p:spPr>
-        <p:txBody>
-          <a:bodyPr wrap="square">
-            <a:spAutoFit/>
-          </a:bodyPr>
-          <a:lstStyle/>
-          <a:p>
-            <a:pPr algn="l"/>
-            <a:r>
-              <a:rPr sz="1000" b="1">
-                <a:solidFill>
-                  <a:srgbClr val="5B21B6"/>
-                </a:solidFill>
-              </a:rPr>
-              <a:t>④  연관 추천 데이터 의존성</a:t>
-            </a:r>
-          </a:p>
-        </p:txBody>
-      </p:sp>
-      <p:sp>
-        <p:nvSpPr>
-          <p:cNvPr id="30" name="TextBox 29"/>
-          <p:cNvSpPr txBox="1"/>
-          <p:nvPr/>
-        </p:nvSpPr>
-        <p:spPr>
-          <a:xfrm>
-            <a:off x="466344" y="3918204"/>
-            <a:ext cx="3931920" cy="310896"/>
-          </a:xfrm>
-          <a:prstGeom prst="rect">
-            <a:avLst/>
-          </a:prstGeom>
-          <a:noFill/>
-        </p:spPr>
-        <p:txBody>
-          <a:bodyPr wrap="square">
-            <a:spAutoFit/>
-          </a:bodyPr>
-          <a:lstStyle/>
-          <a:p>
-            <a:pPr algn="l"/>
-            <a:r>
-              <a:rPr sz="850" b="0">
-                <a:solidFill>
-                  <a:srgbClr val="374151"/>
-                </a:solidFill>
-              </a:rPr>
-              <a:t>Apriori — PDF 수 부족 시 규칙 미생성</a:t>
-            </a:r>
-          </a:p>
-          <a:p>
-            <a:pPr algn="l"/>
-            <a:r>
-              <a:rPr sz="850" b="0">
-                <a:solidFill>
-                  <a:srgbClr val="64748B"/>
-                </a:solidFill>
-              </a:rPr>
-              <a:t>소량 데이터에서 Jaccard 단독 fallback</a:t>
-            </a:r>
-          </a:p>
-        </p:txBody>
-      </p:sp>
-      <p:sp>
-        <p:nvSpPr>
-          <p:cNvPr id="31" name="Rectangle 30"/>
-          <p:cNvSpPr/>
-          <p:nvPr/>
-        </p:nvSpPr>
-        <p:spPr>
-          <a:xfrm>
-            <a:off x="320040" y="4297680"/>
-            <a:ext cx="4114800" cy="621792"/>
-          </a:xfrm>
-          <a:prstGeom prst="rect">
-            <a:avLst/>
-          </a:prstGeom>
-          <a:solidFill>
-            <a:srgbClr val="EFF6FF"/>
-          </a:solidFill>
-          <a:ln>
-            <a:noFill/>
-          </a:ln>
-        </p:spPr>
-        <p:style>
-          <a:lnRef idx="1">
-            <a:schemeClr val="accent1"/>
-          </a:lnRef>
-          <a:fillRef idx="3">
-            <a:schemeClr val="accent1"/>
-          </a:fillRef>
-          <a:effectRef idx="2">
-            <a:schemeClr val="accent1"/>
-          </a:effectRef>
-          <a:fontRef idx="minor">
-            <a:schemeClr val="lt1"/>
-          </a:fontRef>
-        </p:style>
-        <p:txBody>
-          <a:bodyPr rtlCol="0" anchor="ctr"/>
-          <a:lstStyle/>
-          <a:p>
-            <a:pPr algn="ctr"/>
-            <a:endParaRPr/>
-          </a:p>
-        </p:txBody>
-      </p:sp>
-      <p:sp>
-        <p:nvSpPr>
-          <p:cNvPr id="32" name="Rectangle 31"/>
-          <p:cNvSpPr/>
-          <p:nvPr/>
-        </p:nvSpPr>
-        <p:spPr>
-          <a:xfrm>
-            <a:off x="320040" y="4297680"/>
-            <a:ext cx="45720" cy="621792"/>
-          </a:xfrm>
-          <a:prstGeom prst="rect">
-            <a:avLst/>
-          </a:prstGeom>
-          <a:solidFill>
-            <a:srgbClr val="1E3A8A"/>
-          </a:solidFill>
-          <a:ln>
-            <a:noFill/>
-          </a:ln>
-        </p:spPr>
-        <p:style>
-          <a:lnRef idx="1">
-            <a:schemeClr val="accent1"/>
-          </a:lnRef>
-          <a:fillRef idx="3">
-            <a:schemeClr val="accent1"/>
-          </a:fillRef>
-          <a:effectRef idx="2">
-            <a:schemeClr val="accent1"/>
-          </a:effectRef>
-          <a:fontRef idx="minor">
-            <a:schemeClr val="lt1"/>
-          </a:fontRef>
-        </p:style>
-        <p:txBody>
-          <a:bodyPr rtlCol="0" anchor="ctr"/>
-          <a:lstStyle/>
-          <a:p>
-            <a:pPr algn="ctr"/>
-            <a:endParaRPr/>
-          </a:p>
-        </p:txBody>
-      </p:sp>
-      <p:sp>
-        <p:nvSpPr>
-          <p:cNvPr id="33" name="TextBox 32"/>
-          <p:cNvSpPr txBox="1"/>
-          <p:nvPr/>
-        </p:nvSpPr>
-        <p:spPr>
-          <a:xfrm>
-            <a:off x="466344" y="4352544"/>
-            <a:ext cx="3931920" cy="219456"/>
-          </a:xfrm>
-          <a:prstGeom prst="rect">
-            <a:avLst/>
-          </a:prstGeom>
-          <a:noFill/>
-        </p:spPr>
-        <p:txBody>
-          <a:bodyPr wrap="square">
-            <a:spAutoFit/>
-          </a:bodyPr>
-          <a:lstStyle/>
-          <a:p>
-            <a:pPr algn="l"/>
-            <a:r>
-              <a:rPr sz="1000" b="1">
-                <a:solidFill>
-                  <a:srgbClr val="1E40AF"/>
-                </a:solidFill>
-              </a:rPr>
-              <a:t>⑤  로컬 AI 모델 학습 한계</a:t>
-            </a:r>
-          </a:p>
-        </p:txBody>
-      </p:sp>
-      <p:sp>
-        <p:nvSpPr>
-          <p:cNvPr id="34" name="TextBox 33"/>
-          <p:cNvSpPr txBox="1"/>
-          <p:nvPr/>
-        </p:nvSpPr>
-        <p:spPr>
-          <a:xfrm>
-            <a:off x="466344" y="4590288"/>
-            <a:ext cx="3931920" cy="353943"/>
-          </a:xfrm>
-          <a:prstGeom prst="rect">
-            <a:avLst/>
-          </a:prstGeom>
-          <a:noFill/>
-        </p:spPr>
-        <p:txBody>
-          <a:bodyPr wrap="square">
-            <a:spAutoFit/>
-          </a:bodyPr>
-          <a:lstStyle/>
-          <a:p>
-            <a:pPr algn="l"/>
-            <a:r>
-              <a:rPr sz="850" b="0" dirty="0" err="1">
-                <a:solidFill>
-                  <a:srgbClr val="374151"/>
-                </a:solidFill>
-              </a:rPr>
-              <a:t>규칙</a:t>
-            </a:r>
-            <a:r>
-              <a:rPr sz="850" b="0" dirty="0">
-                <a:solidFill>
-                  <a:srgbClr val="374151"/>
-                </a:solidFill>
-              </a:rPr>
-              <a:t> </a:t>
-            </a:r>
-            <a:r>
-              <a:rPr sz="850" b="0" dirty="0" err="1">
-                <a:solidFill>
-                  <a:srgbClr val="374151"/>
-                </a:solidFill>
-              </a:rPr>
-              <a:t>기반</a:t>
-            </a:r>
-            <a:r>
-              <a:rPr sz="850" b="0" dirty="0">
-                <a:solidFill>
-                  <a:srgbClr val="374151"/>
-                </a:solidFill>
-              </a:rPr>
-              <a:t> 외 ML/</a:t>
-            </a:r>
-            <a:r>
-              <a:rPr sz="850" b="0" dirty="0" err="1">
-                <a:solidFill>
-                  <a:srgbClr val="374151"/>
-                </a:solidFill>
-              </a:rPr>
-              <a:t>파인튜닝</a:t>
-            </a:r>
-            <a:r>
-              <a:rPr sz="850" b="0" dirty="0">
-                <a:solidFill>
-                  <a:srgbClr val="374151"/>
-                </a:solidFill>
-              </a:rPr>
-              <a:t> </a:t>
-            </a:r>
-            <a:r>
-              <a:rPr sz="850" b="0" dirty="0" err="1">
-                <a:solidFill>
-                  <a:srgbClr val="374151"/>
-                </a:solidFill>
-              </a:rPr>
-              <a:t>모델</a:t>
-            </a:r>
-            <a:r>
-              <a:rPr sz="850" b="0" dirty="0">
-                <a:solidFill>
-                  <a:srgbClr val="374151"/>
-                </a:solidFill>
-              </a:rPr>
-              <a:t> </a:t>
-            </a:r>
-            <a:r>
-              <a:rPr sz="850" b="0" dirty="0" err="1">
-                <a:solidFill>
-                  <a:srgbClr val="374151"/>
-                </a:solidFill>
-              </a:rPr>
-              <a:t>도입</a:t>
-            </a:r>
-            <a:r>
-              <a:rPr sz="850" b="0" dirty="0">
-                <a:solidFill>
-                  <a:srgbClr val="374151"/>
-                </a:solidFill>
-              </a:rPr>
-              <a:t> </a:t>
-            </a:r>
-            <a:r>
-              <a:rPr sz="850" b="0" dirty="0" err="1">
-                <a:solidFill>
-                  <a:srgbClr val="374151"/>
-                </a:solidFill>
-              </a:rPr>
-              <a:t>시도</a:t>
-            </a:r>
-            <a:endParaRPr sz="850" b="0" dirty="0">
-              <a:solidFill>
-                <a:srgbClr val="374151"/>
-              </a:solidFill>
-            </a:endParaRPr>
-          </a:p>
-          <a:p>
-            <a:pPr algn="l"/>
-            <a:r>
-              <a:rPr sz="850" b="0" dirty="0">
-                <a:solidFill>
-                  <a:srgbClr val="64748B"/>
-                </a:solidFill>
-              </a:rPr>
-              <a:t>GPU </a:t>
-            </a:r>
-            <a:r>
-              <a:rPr sz="850" b="0" dirty="0" err="1">
-                <a:solidFill>
-                  <a:srgbClr val="64748B"/>
-                </a:solidFill>
-              </a:rPr>
-              <a:t>성능</a:t>
-            </a:r>
-            <a:r>
-              <a:rPr sz="850" b="0" dirty="0">
-                <a:solidFill>
-                  <a:srgbClr val="64748B"/>
-                </a:solidFill>
-              </a:rPr>
-              <a:t> </a:t>
-            </a:r>
-            <a:r>
-              <a:rPr sz="850" b="0" dirty="0" err="1">
-                <a:solidFill>
-                  <a:srgbClr val="64748B"/>
-                </a:solidFill>
-              </a:rPr>
-              <a:t>부족</a:t>
-            </a:r>
-            <a:r>
-              <a:rPr sz="850" b="0" dirty="0">
-                <a:solidFill>
-                  <a:srgbClr val="64748B"/>
-                </a:solidFill>
-              </a:rPr>
-              <a:t> · </a:t>
-            </a:r>
-            <a:r>
-              <a:rPr sz="850" b="0" dirty="0" err="1">
-                <a:solidFill>
-                  <a:srgbClr val="64748B"/>
-                </a:solidFill>
-              </a:rPr>
-              <a:t>데이터</a:t>
-            </a:r>
-            <a:r>
-              <a:rPr sz="850" b="0" dirty="0">
-                <a:solidFill>
-                  <a:srgbClr val="64748B"/>
-                </a:solidFill>
-              </a:rPr>
-              <a:t> </a:t>
-            </a:r>
-            <a:r>
-              <a:rPr sz="850" b="0" dirty="0" err="1">
-                <a:solidFill>
-                  <a:srgbClr val="64748B"/>
-                </a:solidFill>
-              </a:rPr>
-              <a:t>부족</a:t>
-            </a:r>
-            <a:r>
-              <a:rPr sz="850" b="0" dirty="0">
-                <a:solidFill>
-                  <a:srgbClr val="64748B"/>
-                </a:solidFill>
-              </a:rPr>
-              <a:t> · </a:t>
-            </a:r>
-            <a:r>
-              <a:rPr lang="en-US" sz="850" b="0" dirty="0">
-                <a:solidFill>
-                  <a:srgbClr val="64748B"/>
-                </a:solidFill>
-              </a:rPr>
-              <a:t>2</a:t>
-            </a:r>
-            <a:r>
-              <a:rPr lang="ko-KR" altLang="en-US" sz="850" b="0" dirty="0">
-                <a:solidFill>
-                  <a:srgbClr val="64748B"/>
-                </a:solidFill>
-              </a:rPr>
-              <a:t>일이라는 짧은 프로젝트 기간</a:t>
-            </a:r>
-            <a:endParaRPr sz="850" b="0" dirty="0">
-              <a:solidFill>
-                <a:srgbClr val="64748B"/>
-              </a:solidFill>
-            </a:endParaRPr>
-          </a:p>
-        </p:txBody>
-      </p:sp>
-      <p:sp>
-        <p:nvSpPr>
-          <p:cNvPr id="35" name="Rectangle 34"/>
-          <p:cNvSpPr/>
-          <p:nvPr/>
-        </p:nvSpPr>
-        <p:spPr>
-          <a:xfrm>
-            <a:off x="4709160" y="1609344"/>
-            <a:ext cx="4114800" cy="621792"/>
-          </a:xfrm>
-          <a:prstGeom prst="rect">
-            <a:avLst/>
-          </a:prstGeom>
-          <a:solidFill>
-            <a:srgbClr val="F0FDF4"/>
-          </a:solidFill>
-          <a:ln>
-            <a:noFill/>
-          </a:ln>
-        </p:spPr>
-        <p:style>
-          <a:lnRef idx="1">
-            <a:schemeClr val="accent1"/>
-          </a:lnRef>
-          <a:fillRef idx="3">
-            <a:schemeClr val="accent1"/>
-          </a:fillRef>
-          <a:effectRef idx="2">
-            <a:schemeClr val="accent1"/>
-          </a:effectRef>
-          <a:fontRef idx="minor">
-            <a:schemeClr val="lt1"/>
-          </a:fontRef>
-        </p:style>
-        <p:txBody>
-          <a:bodyPr rtlCol="0" anchor="ctr"/>
-          <a:lstStyle/>
-          <a:p>
-            <a:pPr algn="ctr"/>
-            <a:endParaRPr/>
-          </a:p>
-        </p:txBody>
-      </p:sp>
-      <p:sp>
-        <p:nvSpPr>
-          <p:cNvPr id="36" name="Rectangle 35"/>
-          <p:cNvSpPr/>
-          <p:nvPr/>
-        </p:nvSpPr>
-        <p:spPr>
-          <a:xfrm>
-            <a:off x="4709160" y="1609344"/>
-            <a:ext cx="45720" cy="621792"/>
-          </a:xfrm>
-          <a:prstGeom prst="rect">
-            <a:avLst/>
-          </a:prstGeom>
-          <a:solidFill>
-            <a:srgbClr val="166534"/>
-          </a:solidFill>
-          <a:ln>
-            <a:noFill/>
-          </a:ln>
-        </p:spPr>
-        <p:style>
-          <a:lnRef idx="1">
-            <a:schemeClr val="accent1"/>
-          </a:lnRef>
-          <a:fillRef idx="3">
-            <a:schemeClr val="accent1"/>
-          </a:fillRef>
-          <a:effectRef idx="2">
-            <a:schemeClr val="accent1"/>
-          </a:effectRef>
-          <a:fontRef idx="minor">
-            <a:schemeClr val="lt1"/>
-          </a:fontRef>
-        </p:style>
-        <p:txBody>
-          <a:bodyPr rtlCol="0" anchor="ctr"/>
-          <a:lstStyle/>
-          <a:p>
-            <a:pPr algn="ctr"/>
-            <a:endParaRPr/>
-          </a:p>
-        </p:txBody>
-      </p:sp>
-      <p:sp>
-        <p:nvSpPr>
-          <p:cNvPr id="37" name="TextBox 36"/>
-          <p:cNvSpPr txBox="1"/>
-          <p:nvPr/>
-        </p:nvSpPr>
-        <p:spPr>
-          <a:xfrm>
-            <a:off x="4855464" y="1664208"/>
-            <a:ext cx="3931920" cy="219456"/>
-          </a:xfrm>
-          <a:prstGeom prst="rect">
-            <a:avLst/>
-          </a:prstGeom>
-          <a:noFill/>
-        </p:spPr>
-        <p:txBody>
-          <a:bodyPr wrap="square">
-            <a:spAutoFit/>
-          </a:bodyPr>
-          <a:lstStyle/>
-          <a:p>
-            <a:pPr algn="l"/>
-            <a:r>
-              <a:rPr sz="1000" b="1">
-                <a:solidFill>
-                  <a:srgbClr val="15803D"/>
-                </a:solidFill>
-              </a:rPr>
-              <a:t>→  다양한 메일 서비스 지원</a:t>
-            </a:r>
-          </a:p>
-        </p:txBody>
-      </p:sp>
-      <p:sp>
-        <p:nvSpPr>
-          <p:cNvPr id="38" name="TextBox 37"/>
-          <p:cNvSpPr txBox="1"/>
-          <p:nvPr/>
-        </p:nvSpPr>
-        <p:spPr>
-          <a:xfrm>
-            <a:off x="4855464" y="1901952"/>
-            <a:ext cx="3931920" cy="310896"/>
-          </a:xfrm>
-          <a:prstGeom prst="rect">
-            <a:avLst/>
-          </a:prstGeom>
-          <a:noFill/>
-        </p:spPr>
-        <p:txBody>
-          <a:bodyPr wrap="square">
-            <a:spAutoFit/>
-          </a:bodyPr>
-          <a:lstStyle/>
-          <a:p>
-            <a:pPr algn="l"/>
-            <a:r>
-              <a:rPr sz="850" b="0">
-                <a:solidFill>
-                  <a:srgbClr val="374151"/>
-                </a:solidFill>
-              </a:rPr>
-              <a:t>Outlook · 네이버 메일 IMAP 확장</a:t>
-            </a:r>
-          </a:p>
-          <a:p>
-            <a:pPr algn="l"/>
-            <a:r>
-              <a:rPr sz="850" b="0">
-                <a:solidFill>
-                  <a:srgbClr val="64748B"/>
-                </a:solidFill>
-              </a:rPr>
-              <a:t>OAuth 2.0 인증으로 보안 강화</a:t>
-            </a:r>
-          </a:p>
-        </p:txBody>
-      </p:sp>
-      <p:sp>
-        <p:nvSpPr>
-          <p:cNvPr id="39" name="Rectangle 38"/>
-          <p:cNvSpPr/>
-          <p:nvPr/>
-        </p:nvSpPr>
-        <p:spPr>
-          <a:xfrm>
-            <a:off x="4709160" y="2281428"/>
-            <a:ext cx="4114800" cy="621792"/>
-          </a:xfrm>
-          <a:prstGeom prst="rect">
-            <a:avLst/>
-          </a:prstGeom>
-          <a:solidFill>
-            <a:srgbClr val="ECFDF5"/>
-          </a:solidFill>
-          <a:ln>
-            <a:noFill/>
-          </a:ln>
-        </p:spPr>
-        <p:style>
-          <a:lnRef idx="1">
-            <a:schemeClr val="accent1"/>
-          </a:lnRef>
-          <a:fillRef idx="3">
-            <a:schemeClr val="accent1"/>
-          </a:fillRef>
-          <a:effectRef idx="2">
-            <a:schemeClr val="accent1"/>
-          </a:effectRef>
-          <a:fontRef idx="minor">
-            <a:schemeClr val="lt1"/>
-          </a:fontRef>
-        </p:style>
-        <p:txBody>
-          <a:bodyPr rtlCol="0" anchor="ctr"/>
-          <a:lstStyle/>
-          <a:p>
-            <a:pPr algn="ctr"/>
-            <a:endParaRPr/>
-          </a:p>
-        </p:txBody>
-      </p:sp>
-      <p:sp>
-        <p:nvSpPr>
-          <p:cNvPr id="40" name="Rectangle 39"/>
-          <p:cNvSpPr/>
-          <p:nvPr/>
-        </p:nvSpPr>
-        <p:spPr>
-          <a:xfrm>
-            <a:off x="4709160" y="2281428"/>
-            <a:ext cx="45720" cy="621792"/>
-          </a:xfrm>
-          <a:prstGeom prst="rect">
-            <a:avLst/>
-          </a:prstGeom>
-          <a:solidFill>
-            <a:srgbClr val="065F46"/>
-          </a:solidFill>
-          <a:ln>
-            <a:noFill/>
-          </a:ln>
-        </p:spPr>
-        <p:style>
-          <a:lnRef idx="1">
-            <a:schemeClr val="accent1"/>
-          </a:lnRef>
-          <a:fillRef idx="3">
-            <a:schemeClr val="accent1"/>
-          </a:fillRef>
-          <a:effectRef idx="2">
-            <a:schemeClr val="accent1"/>
-          </a:effectRef>
-          <a:fontRef idx="minor">
-            <a:schemeClr val="lt1"/>
-          </a:fontRef>
-        </p:style>
-        <p:txBody>
-          <a:bodyPr rtlCol="0" anchor="ctr"/>
-          <a:lstStyle/>
-          <a:p>
-            <a:pPr algn="ctr"/>
-            <a:endParaRPr/>
-          </a:p>
-        </p:txBody>
-      </p:sp>
-      <p:sp>
-        <p:nvSpPr>
-          <p:cNvPr id="41" name="TextBox 40"/>
-          <p:cNvSpPr txBox="1"/>
-          <p:nvPr/>
-        </p:nvSpPr>
-        <p:spPr>
-          <a:xfrm>
-            <a:off x="4855464" y="2336292"/>
-            <a:ext cx="3931920" cy="219456"/>
-          </a:xfrm>
-          <a:prstGeom prst="rect">
-            <a:avLst/>
-          </a:prstGeom>
-          <a:noFill/>
-        </p:spPr>
-        <p:txBody>
-          <a:bodyPr wrap="square">
-            <a:spAutoFit/>
-          </a:bodyPr>
-          <a:lstStyle/>
-          <a:p>
-            <a:pPr algn="l"/>
-            <a:r>
-              <a:rPr sz="1000" b="1">
-                <a:solidFill>
-                  <a:srgbClr val="047857"/>
-                </a:solidFill>
-              </a:rPr>
-              <a:t>→  LLM 기반 비정형 업무 추출</a:t>
-            </a:r>
-          </a:p>
-        </p:txBody>
-      </p:sp>
-      <p:sp>
-        <p:nvSpPr>
-          <p:cNvPr id="42" name="TextBox 41"/>
-          <p:cNvSpPr txBox="1"/>
-          <p:nvPr/>
-        </p:nvSpPr>
-        <p:spPr>
-          <a:xfrm>
-            <a:off x="4855464" y="2574036"/>
-            <a:ext cx="3931920" cy="310896"/>
-          </a:xfrm>
-          <a:prstGeom prst="rect">
-            <a:avLst/>
-          </a:prstGeom>
-          <a:noFill/>
-        </p:spPr>
-        <p:txBody>
-          <a:bodyPr wrap="square">
-            <a:spAutoFit/>
-          </a:bodyPr>
-          <a:lstStyle/>
-          <a:p>
-            <a:pPr algn="l"/>
-            <a:r>
-              <a:rPr sz="850" b="0">
-                <a:solidFill>
-                  <a:srgbClr val="374151"/>
-                </a:solidFill>
-              </a:rPr>
-              <a:t>Claude/GPT로 자연어 메일에서 업무 추출</a:t>
-            </a:r>
-          </a:p>
-          <a:p>
-            <a:pPr algn="l"/>
-            <a:r>
-              <a:rPr sz="850" b="0">
-                <a:solidFill>
-                  <a:srgbClr val="64748B"/>
-                </a:solidFill>
-              </a:rPr>
-              <a:t>현재 rule-based 추출의 보조 레이어로 추가</a:t>
-            </a:r>
-          </a:p>
-        </p:txBody>
-      </p:sp>
-      <p:sp>
-        <p:nvSpPr>
-          <p:cNvPr id="43" name="Rectangle 42"/>
-          <p:cNvSpPr/>
-          <p:nvPr/>
-        </p:nvSpPr>
-        <p:spPr>
-          <a:xfrm>
-            <a:off x="4709160" y="2953512"/>
-            <a:ext cx="4114800" cy="621792"/>
-          </a:xfrm>
-          <a:prstGeom prst="rect">
-            <a:avLst/>
-          </a:prstGeom>
-          <a:solidFill>
-            <a:srgbClr val="F0F9FF"/>
-          </a:solidFill>
-          <a:ln>
-            <a:noFill/>
-          </a:ln>
-        </p:spPr>
-        <p:style>
-          <a:lnRef idx="1">
-            <a:schemeClr val="accent1"/>
-          </a:lnRef>
-          <a:fillRef idx="3">
-            <a:schemeClr val="accent1"/>
-          </a:fillRef>
-          <a:effectRef idx="2">
-            <a:schemeClr val="accent1"/>
-          </a:effectRef>
-          <a:fontRef idx="minor">
-            <a:schemeClr val="lt1"/>
-          </a:fontRef>
-        </p:style>
-        <p:txBody>
-          <a:bodyPr rtlCol="0" anchor="ctr"/>
-          <a:lstStyle/>
-          <a:p>
-            <a:pPr algn="ctr"/>
-            <a:endParaRPr/>
-          </a:p>
-        </p:txBody>
-      </p:sp>
-      <p:sp>
-        <p:nvSpPr>
-          <p:cNvPr id="44" name="Rectangle 43"/>
-          <p:cNvSpPr/>
-          <p:nvPr/>
-        </p:nvSpPr>
-        <p:spPr>
-          <a:xfrm>
-            <a:off x="4709160" y="2953512"/>
-            <a:ext cx="45720" cy="621792"/>
-          </a:xfrm>
-          <a:prstGeom prst="rect">
-            <a:avLst/>
-          </a:prstGeom>
-          <a:solidFill>
-            <a:srgbClr val="065A82"/>
-          </a:solidFill>
-          <a:ln>
-            <a:noFill/>
-          </a:ln>
-        </p:spPr>
-        <p:style>
-          <a:lnRef idx="1">
-            <a:schemeClr val="accent1"/>
-          </a:lnRef>
-          <a:fillRef idx="3">
-            <a:schemeClr val="accent1"/>
-          </a:fillRef>
-          <a:effectRef idx="2">
-            <a:schemeClr val="accent1"/>
-          </a:effectRef>
-          <a:fontRef idx="minor">
-            <a:schemeClr val="lt1"/>
-          </a:fontRef>
-        </p:style>
-        <p:txBody>
-          <a:bodyPr rtlCol="0" anchor="ctr"/>
-          <a:lstStyle/>
-          <a:p>
-            <a:pPr algn="ctr"/>
-            <a:endParaRPr/>
-          </a:p>
-        </p:txBody>
-      </p:sp>
-      <p:sp>
-        <p:nvSpPr>
-          <p:cNvPr id="45" name="TextBox 44"/>
-          <p:cNvSpPr txBox="1"/>
-          <p:nvPr/>
-        </p:nvSpPr>
-        <p:spPr>
-          <a:xfrm>
-            <a:off x="4855464" y="3008376"/>
-            <a:ext cx="3931920" cy="219456"/>
-          </a:xfrm>
-          <a:prstGeom prst="rect">
-            <a:avLst/>
-          </a:prstGeom>
-          <a:noFill/>
-        </p:spPr>
-        <p:txBody>
-          <a:bodyPr wrap="square">
-            <a:spAutoFit/>
-          </a:bodyPr>
-          <a:lstStyle/>
-          <a:p>
-            <a:pPr algn="l"/>
-            <a:r>
-              <a:rPr sz="1000" b="1">
-                <a:solidFill>
-                  <a:srgbClr val="0369A1"/>
-                </a:solidFill>
-              </a:rPr>
-              <a:t>→  마감일 이해 고도화</a:t>
-            </a:r>
-          </a:p>
-        </p:txBody>
-      </p:sp>
-      <p:sp>
-        <p:nvSpPr>
-          <p:cNvPr id="46" name="TextBox 45"/>
-          <p:cNvSpPr txBox="1"/>
-          <p:nvPr/>
-        </p:nvSpPr>
-        <p:spPr>
-          <a:xfrm>
-            <a:off x="4855464" y="3246120"/>
-            <a:ext cx="3931920" cy="310896"/>
-          </a:xfrm>
-          <a:prstGeom prst="rect">
-            <a:avLst/>
-          </a:prstGeom>
-          <a:noFill/>
-        </p:spPr>
-        <p:txBody>
-          <a:bodyPr wrap="square">
-            <a:spAutoFit/>
-          </a:bodyPr>
-          <a:lstStyle/>
-          <a:p>
-            <a:pPr algn="l"/>
-            <a:r>
-              <a:rPr sz="850" b="0">
-                <a:solidFill>
-                  <a:srgbClr val="374151"/>
-                </a:solidFill>
-              </a:rPr>
-              <a:t>LLM으로 '연말까지', 'Q3 전' 등 해석</a:t>
-            </a:r>
-          </a:p>
-          <a:p>
-            <a:pPr algn="l"/>
-            <a:r>
-              <a:rPr sz="850" b="0">
-                <a:solidFill>
-                  <a:srgbClr val="64748B"/>
-                </a:solidFill>
-              </a:rPr>
-              <a:t>캘린더 연동 · 공휴일 자동 반영</a:t>
-            </a:r>
-          </a:p>
-        </p:txBody>
-      </p:sp>
-      <p:sp>
-        <p:nvSpPr>
-          <p:cNvPr id="47" name="Rectangle 46"/>
-          <p:cNvSpPr/>
-          <p:nvPr/>
-        </p:nvSpPr>
-        <p:spPr>
-          <a:xfrm>
-            <a:off x="4709160" y="3625596"/>
-            <a:ext cx="4114800" cy="621792"/>
-          </a:xfrm>
-          <a:prstGeom prst="rect">
-            <a:avLst/>
-          </a:prstGeom>
-          <a:solidFill>
-            <a:srgbClr val="F0FDFA"/>
-          </a:solidFill>
-          <a:ln>
-            <a:noFill/>
-          </a:ln>
-        </p:spPr>
-        <p:style>
-          <a:lnRef idx="1">
-            <a:schemeClr val="accent1"/>
-          </a:lnRef>
-          <a:fillRef idx="3">
-            <a:schemeClr val="accent1"/>
-          </a:fillRef>
-          <a:effectRef idx="2">
-            <a:schemeClr val="accent1"/>
-          </a:effectRef>
-          <a:fontRef idx="minor">
-            <a:schemeClr val="lt1"/>
-          </a:fontRef>
-        </p:style>
-        <p:txBody>
-          <a:bodyPr rtlCol="0" anchor="ctr"/>
-          <a:lstStyle/>
-          <a:p>
-            <a:pPr algn="ctr"/>
-            <a:endParaRPr/>
-          </a:p>
-        </p:txBody>
-      </p:sp>
-      <p:sp>
-        <p:nvSpPr>
-          <p:cNvPr id="48" name="Rectangle 47"/>
-          <p:cNvSpPr/>
-          <p:nvPr/>
-        </p:nvSpPr>
-        <p:spPr>
-          <a:xfrm>
-            <a:off x="4709160" y="3625596"/>
-            <a:ext cx="45720" cy="621792"/>
-          </a:xfrm>
-          <a:prstGeom prst="rect">
-            <a:avLst/>
-          </a:prstGeom>
-          <a:solidFill>
-            <a:srgbClr val="0D9488"/>
-          </a:solidFill>
-          <a:ln>
-            <a:noFill/>
-          </a:ln>
-        </p:spPr>
-        <p:style>
-          <a:lnRef idx="1">
-            <a:schemeClr val="accent1"/>
-          </a:lnRef>
-          <a:fillRef idx="3">
-            <a:schemeClr val="accent1"/>
-          </a:fillRef>
-          <a:effectRef idx="2">
-            <a:schemeClr val="accent1"/>
-          </a:effectRef>
-          <a:fontRef idx="minor">
-            <a:schemeClr val="lt1"/>
-          </a:fontRef>
-        </p:style>
-        <p:txBody>
-          <a:bodyPr rtlCol="0" anchor="ctr"/>
-          <a:lstStyle/>
-          <a:p>
-            <a:pPr algn="ctr"/>
-            <a:endParaRPr/>
-          </a:p>
-        </p:txBody>
-      </p:sp>
-      <p:sp>
-        <p:nvSpPr>
-          <p:cNvPr id="49" name="TextBox 48"/>
-          <p:cNvSpPr txBox="1"/>
-          <p:nvPr/>
-        </p:nvSpPr>
-        <p:spPr>
-          <a:xfrm>
-            <a:off x="4855464" y="3680459"/>
-            <a:ext cx="3931920" cy="219456"/>
-          </a:xfrm>
-          <a:prstGeom prst="rect">
-            <a:avLst/>
-          </a:prstGeom>
-          <a:noFill/>
-        </p:spPr>
-        <p:txBody>
-          <a:bodyPr wrap="square">
-            <a:spAutoFit/>
-          </a:bodyPr>
-          <a:lstStyle/>
-          <a:p>
-            <a:pPr algn="l"/>
-            <a:r>
-              <a:rPr sz="1000" b="1">
-                <a:solidFill>
-                  <a:srgbClr val="0F766E"/>
-                </a:solidFill>
-              </a:rPr>
-              <a:t>→  경량 로컬 모델 적용</a:t>
-            </a:r>
-          </a:p>
-        </p:txBody>
-      </p:sp>
-      <p:sp>
-        <p:nvSpPr>
-          <p:cNvPr id="50" name="TextBox 49"/>
-          <p:cNvSpPr txBox="1"/>
-          <p:nvPr/>
-        </p:nvSpPr>
-        <p:spPr>
-          <a:xfrm>
-            <a:off x="4855464" y="3918204"/>
-            <a:ext cx="3931920" cy="310896"/>
-          </a:xfrm>
-          <a:prstGeom prst="rect">
-            <a:avLst/>
-          </a:prstGeom>
-          <a:noFill/>
-        </p:spPr>
-        <p:txBody>
-          <a:bodyPr wrap="square">
-            <a:spAutoFit/>
-          </a:bodyPr>
-          <a:lstStyle/>
-          <a:p>
-            <a:pPr algn="l"/>
-            <a:r>
-              <a:rPr sz="850" b="0">
-                <a:solidFill>
-                  <a:srgbClr val="374151"/>
-                </a:solidFill>
-              </a:rPr>
-              <a:t>데이터 축적 후 경량 fine-tuned 모델 도입</a:t>
-            </a:r>
-          </a:p>
-          <a:p>
-            <a:pPr algn="l"/>
-            <a:r>
-              <a:rPr sz="850" b="0">
-                <a:solidFill>
-                  <a:srgbClr val="64748B"/>
-                </a:solidFill>
-              </a:rPr>
-              <a:t>임베딩(BERT) 기반 유사도로 추천 품질 향상</a:t>
-            </a:r>
-          </a:p>
-        </p:txBody>
-      </p:sp>
-      <p:sp>
-        <p:nvSpPr>
-          <p:cNvPr id="51" name="Rectangle 50"/>
-          <p:cNvSpPr/>
-          <p:nvPr/>
-        </p:nvSpPr>
-        <p:spPr>
-          <a:xfrm>
-            <a:off x="4709160" y="4297680"/>
-            <a:ext cx="4114800" cy="621792"/>
-          </a:xfrm>
-          <a:prstGeom prst="rect">
-            <a:avLst/>
-          </a:prstGeom>
-          <a:solidFill>
-            <a:srgbClr val="EFF6FF"/>
-          </a:solidFill>
-          <a:ln>
-            <a:noFill/>
-          </a:ln>
-        </p:spPr>
-        <p:style>
-          <a:lnRef idx="1">
-            <a:schemeClr val="accent1"/>
-          </a:lnRef>
-          <a:fillRef idx="3">
-            <a:schemeClr val="accent1"/>
-          </a:fillRef>
-          <a:effectRef idx="2">
-            <a:schemeClr val="accent1"/>
-          </a:effectRef>
-          <a:fontRef idx="minor">
-            <a:schemeClr val="lt1"/>
-          </a:fontRef>
-        </p:style>
-        <p:txBody>
-          <a:bodyPr rtlCol="0" anchor="ctr"/>
-          <a:lstStyle/>
-          <a:p>
-            <a:pPr algn="ctr"/>
-            <a:endParaRPr/>
-          </a:p>
-        </p:txBody>
-      </p:sp>
-      <p:sp>
-        <p:nvSpPr>
-          <p:cNvPr id="52" name="Rectangle 51"/>
-          <p:cNvSpPr/>
-          <p:nvPr/>
-        </p:nvSpPr>
-        <p:spPr>
-          <a:xfrm>
-            <a:off x="4709160" y="4297680"/>
-            <a:ext cx="45720" cy="621792"/>
-          </a:xfrm>
-          <a:prstGeom prst="rect">
-            <a:avLst/>
-          </a:prstGeom>
-          <a:solidFill>
-            <a:srgbClr val="1D4ED8"/>
-          </a:solidFill>
-          <a:ln>
-            <a:noFill/>
-          </a:ln>
-        </p:spPr>
-        <p:style>
-          <a:lnRef idx="1">
-            <a:schemeClr val="accent1"/>
-          </a:lnRef>
-          <a:fillRef idx="3">
-            <a:schemeClr val="accent1"/>
-          </a:fillRef>
-          <a:effectRef idx="2">
-            <a:schemeClr val="accent1"/>
-          </a:effectRef>
-          <a:fontRef idx="minor">
-            <a:schemeClr val="lt1"/>
-          </a:fontRef>
-        </p:style>
-        <p:txBody>
-          <a:bodyPr rtlCol="0" anchor="ctr"/>
-          <a:lstStyle/>
-          <a:p>
-            <a:pPr algn="ctr"/>
-            <a:endParaRPr/>
-          </a:p>
-        </p:txBody>
-      </p:sp>
-      <p:sp>
-        <p:nvSpPr>
-          <p:cNvPr id="53" name="TextBox 52"/>
-          <p:cNvSpPr txBox="1"/>
-          <p:nvPr/>
-        </p:nvSpPr>
-        <p:spPr>
-          <a:xfrm>
-            <a:off x="4855464" y="4352544"/>
-            <a:ext cx="3931920" cy="219456"/>
-          </a:xfrm>
-          <a:prstGeom prst="rect">
-            <a:avLst/>
-          </a:prstGeom>
-          <a:noFill/>
-        </p:spPr>
-        <p:txBody>
-          <a:bodyPr wrap="square">
-            <a:spAutoFit/>
-          </a:bodyPr>
-          <a:lstStyle/>
-          <a:p>
-            <a:pPr algn="l"/>
-            <a:r>
-              <a:rPr sz="1000" b="1">
-                <a:solidFill>
-                  <a:srgbClr val="1E40AF"/>
-                </a:solidFill>
-              </a:rPr>
-              <a:t>→  실시간 알림 · 피드백 루프</a:t>
-            </a:r>
-          </a:p>
-        </p:txBody>
-      </p:sp>
-      <p:sp>
-        <p:nvSpPr>
-          <p:cNvPr id="54" name="TextBox 53"/>
-          <p:cNvSpPr txBox="1"/>
-          <p:nvPr/>
-        </p:nvSpPr>
-        <p:spPr>
-          <a:xfrm>
-            <a:off x="4855464" y="4590288"/>
-            <a:ext cx="3931920" cy="310896"/>
-          </a:xfrm>
-          <a:prstGeom prst="rect">
-            <a:avLst/>
-          </a:prstGeom>
-          <a:noFill/>
-        </p:spPr>
-        <p:txBody>
-          <a:bodyPr wrap="square">
-            <a:spAutoFit/>
-          </a:bodyPr>
-          <a:lstStyle/>
-          <a:p>
-            <a:pPr algn="l"/>
-            <a:r>
-              <a:rPr sz="850" b="0">
-                <a:solidFill>
-                  <a:srgbClr val="374151"/>
-                </a:solidFill>
-              </a:rPr>
-              <a:t>마감 임박 알림 · Slack / Teams 연동</a:t>
-            </a:r>
-          </a:p>
-          <a:p>
-            <a:pPr algn="l"/>
-            <a:r>
-              <a:rPr sz="850" b="0">
-                <a:solidFill>
-                  <a:srgbClr val="64748B"/>
-                </a:solidFill>
-              </a:rPr>
-              <a:t>사용자 피드백으로 분류·추천 모델 자동 개선</a:t>
-            </a:r>
-          </a:p>
-        </p:txBody>
-      </p:sp>
-      <p:sp>
-        <p:nvSpPr>
-          <p:cNvPr id="55" name="Rectangle 54"/>
-          <p:cNvSpPr/>
-          <p:nvPr/>
-        </p:nvSpPr>
-        <p:spPr>
-          <a:xfrm>
-            <a:off x="320040" y="4983480"/>
-            <a:ext cx="8503920" cy="237744"/>
-          </a:xfrm>
-          <a:prstGeom prst="rect">
-            <a:avLst/>
-          </a:prstGeom>
-          <a:solidFill>
-            <a:srgbClr val="1E293B"/>
-          </a:solidFill>
-          <a:ln>
-            <a:noFill/>
-          </a:ln>
-        </p:spPr>
-        <p:style>
-          <a:lnRef idx="1">
-            <a:schemeClr val="accent1"/>
-          </a:lnRef>
-          <a:fillRef idx="3">
-            <a:schemeClr val="accent1"/>
-          </a:fillRef>
-          <a:effectRef idx="2">
-            <a:schemeClr val="accent1"/>
-          </a:effectRef>
-          <a:fontRef idx="minor">
-            <a:schemeClr val="lt1"/>
-          </a:fontRef>
-        </p:style>
-        <p:txBody>
-          <a:bodyPr rtlCol="0" anchor="ctr"/>
-          <a:lstStyle/>
-          <a:p>
-            <a:pPr algn="ctr"/>
-            <a:endParaRPr/>
-          </a:p>
-        </p:txBody>
-      </p:sp>
-      <p:sp>
-        <p:nvSpPr>
-          <p:cNvPr id="56" name="TextBox 55"/>
-          <p:cNvSpPr txBox="1"/>
-          <p:nvPr/>
-        </p:nvSpPr>
-        <p:spPr>
-          <a:xfrm>
-            <a:off x="475488" y="5020056"/>
-            <a:ext cx="8229600" cy="164592"/>
-          </a:xfrm>
-          <a:prstGeom prst="rect">
-            <a:avLst/>
-          </a:prstGeom>
-          <a:noFill/>
-        </p:spPr>
-        <p:txBody>
-          <a:bodyPr wrap="square">
-            <a:spAutoFit/>
-          </a:bodyPr>
-          <a:lstStyle/>
-          <a:p>
-            <a:pPr algn="l"/>
-            <a:r>
-              <a:rPr sz="850" b="0">
-                <a:solidFill>
-                  <a:srgbClr val="94A3B8"/>
-                </a:solidFill>
-              </a:rPr>
-              <a:t>현재는 데모·수업용 구현 수준 — 데이터 축적 및 GPU 환경 확보 후 단계적으로 적용 예정</a:t>
-            </a:r>
-          </a:p>
-        </p:txBody>
-      </p:sp>
-      <p:sp>
-        <p:nvSpPr>
-          <p:cNvPr id="61" name="Shape 1">
-            <a:extLst>
-              <a:ext uri="{FF2B5EF4-FFF2-40B4-BE49-F238E27FC236}">
-                <a16:creationId xmlns:a16="http://schemas.microsoft.com/office/drawing/2014/main" id="{3E834C6F-32F2-96FB-64B3-C4274D6A8851}"/>
-              </a:ext>
-            </a:extLst>
-          </p:cNvPr>
-          <p:cNvSpPr/>
-          <p:nvPr/>
-        </p:nvSpPr>
-        <p:spPr>
-          <a:xfrm>
-            <a:off x="499872" y="289560"/>
-            <a:ext cx="566928" cy="475488"/>
-          </a:xfrm>
-          <a:prstGeom prst="rect">
-            <a:avLst/>
-          </a:prstGeom>
-          <a:solidFill>
-            <a:srgbClr val="0D9488"/>
-          </a:solidFill>
-          <a:ln w="12700">
-            <a:solidFill>
-              <a:srgbClr val="0D9488"/>
-            </a:solidFill>
-            <a:prstDash val="solid"/>
-          </a:ln>
-        </p:spPr>
-        <p:txBody>
-          <a:bodyPr/>
-          <a:lstStyle/>
-          <a:p>
-            <a:endParaRPr lang="ko-KR" altLang="en-US"/>
-          </a:p>
-        </p:txBody>
-      </p:sp>
-      <p:sp>
-        <p:nvSpPr>
-          <p:cNvPr id="62" name="Text 2">
-            <a:extLst>
-              <a:ext uri="{FF2B5EF4-FFF2-40B4-BE49-F238E27FC236}">
-                <a16:creationId xmlns:a16="http://schemas.microsoft.com/office/drawing/2014/main" id="{7F04EBD4-0A5A-59E5-36B0-47B5B8DDF329}"/>
-              </a:ext>
-            </a:extLst>
-          </p:cNvPr>
-          <p:cNvSpPr/>
-          <p:nvPr/>
-        </p:nvSpPr>
-        <p:spPr>
-          <a:xfrm>
-            <a:off x="499872" y="289560"/>
-            <a:ext cx="566928" cy="475488"/>
-          </a:xfrm>
-          <a:prstGeom prst="rect">
-            <a:avLst/>
-          </a:prstGeom>
-          <a:noFill/>
-          <a:ln/>
-        </p:spPr>
-        <p:txBody>
-          <a:bodyPr wrap="square" lIns="0" tIns="0" rIns="0" bIns="0" rtlCol="0" anchor="ctr"/>
-          <a:lstStyle/>
-          <a:p>
-            <a:pPr marL="0" indent="0" algn="ctr">
-              <a:buNone/>
-            </a:pPr>
-            <a:r>
-              <a:rPr lang="en-US" b="1">
-                <a:solidFill>
-                  <a:srgbClr val="FFFFFF"/>
-                </a:solidFill>
-                <a:latin typeface="맑은 고딕" pitchFamily="34" charset="0"/>
-                <a:ea typeface="맑은 고딕" pitchFamily="34" charset="-122"/>
-                <a:cs typeface="맑은 고딕" pitchFamily="34" charset="-120"/>
-              </a:rPr>
-              <a:t>08</a:t>
-            </a:r>
-            <a:endParaRPr lang="en-US" sz="1500" dirty="0"/>
-          </a:p>
-        </p:txBody>
-      </p:sp>
-      <p:sp>
-        <p:nvSpPr>
-          <p:cNvPr id="63" name="Text 3">
-            <a:extLst>
-              <a:ext uri="{FF2B5EF4-FFF2-40B4-BE49-F238E27FC236}">
-                <a16:creationId xmlns:a16="http://schemas.microsoft.com/office/drawing/2014/main" id="{CBB1C8EA-A834-F38F-78A4-3CA9BBDAED3B}"/>
-              </a:ext>
-            </a:extLst>
-          </p:cNvPr>
-          <p:cNvSpPr/>
-          <p:nvPr/>
-        </p:nvSpPr>
-        <p:spPr>
-          <a:xfrm>
-            <a:off x="1231392" y="207264"/>
-            <a:ext cx="7818120" cy="640080"/>
-          </a:xfrm>
-          <a:prstGeom prst="rect">
-            <a:avLst/>
-          </a:prstGeom>
-          <a:noFill/>
-          <a:ln/>
-        </p:spPr>
-        <p:txBody>
-          <a:bodyPr wrap="square" lIns="0" tIns="0" rIns="0" bIns="0" rtlCol="0" anchor="ctr"/>
-          <a:lstStyle/>
-          <a:p>
-            <a:pPr marL="0" indent="0">
-              <a:buNone/>
-            </a:pPr>
-            <a:r>
-              <a:rPr lang="en-US" sz="2400" b="1" dirty="0">
-                <a:solidFill>
-                  <a:srgbClr val="FFFFFF"/>
-                </a:solidFill>
-                <a:latin typeface="맑은 고딕" pitchFamily="34" charset="0"/>
-                <a:ea typeface="맑은 고딕" pitchFamily="34" charset="-122"/>
-                <a:cs typeface="맑은 고딕" pitchFamily="34" charset="-120"/>
-              </a:rPr>
-              <a:t>기대 효과</a:t>
-            </a:r>
-            <a:endParaRPr lang="en-US" sz="2400" dirty="0"/>
-          </a:p>
-        </p:txBody>
-      </p:sp>
-    </p:spTree>
-    <p:extLst>
-      <p:ext uri="{BB962C8B-B14F-4D97-AF65-F5344CB8AC3E}">
-        <p14:creationId xmlns:p14="http://schemas.microsoft.com/office/powerpoint/2010/main" val="1721397598"/>
-      </p:ext>
-    </p:extLst>
-  </p:cSld>
-  <p:clrMapOvr>
-    <a:masterClrMapping/>
-  </p:clrMapOvr>
-</p:sld>
-</file>
-
-<file path=ppt/slides/slide16.xml><?xml version="1.0" encoding="utf-8"?>
 <p:sld xmlns:a="http://schemas.openxmlformats.org/drawingml/2006/main" xmlns:r="http://schemas.openxmlformats.org/officeDocument/2006/relationships" xmlns:p="http://schemas.openxmlformats.org/presentationml/2006/main">
   <p:cSld>
     <p:spTree>
@@ -10628,7 +7827,7 @@
                   <a:srgbClr val="64748B"/>
                 </a:solidFill>
               </a:rPr>
-              <a:t>14  /  14</a:t>
+              <a:t>13  /  13</a:t>
             </a:r>
             <a:endParaRPr lang="en-US" sz="1000" dirty="0"/>
           </a:p>
@@ -13995,12 +11194,10 @@
           <a:prstGeom prst="rect">
             <a:avLst/>
           </a:prstGeom>
-          <a:solidFill>
-            <a:srgbClr val="F5F7FA"/>
-          </a:solidFill>
+          <a:noFill/>
           <a:ln w="12700">
             <a:solidFill>
-              <a:srgbClr val="F5F7FA"/>
+              <a:schemeClr val="bg1"/>
             </a:solidFill>
             <a:prstDash val="solid"/>
           </a:ln>
@@ -14043,7 +11240,7 @@
                   <a:srgbClr val="64748B"/>
                 </a:solidFill>
               </a:rPr>
-              <a:t>1  / 11  </a:t>
+              <a:t>1  / 13  </a:t>
             </a:r>
             <a:endParaRPr lang="en-US" sz="1000" dirty="0"/>
           </a:p>
@@ -15745,7 +12942,7 @@
                   <a:srgbClr val="64748B"/>
                 </a:solidFill>
               </a:rPr>
-              <a:t>2  /  14</a:t>
+              <a:t>2  / 13</a:t>
             </a:r>
             <a:endParaRPr lang="en-US" sz="1000" dirty="0"/>
           </a:p>
@@ -17507,7 +14704,7 @@
                   <a:srgbClr val="64748B"/>
                 </a:solidFill>
               </a:rPr>
-              <a:t>3  /  14</a:t>
+              <a:t>3  /  13</a:t>
             </a:r>
             <a:endParaRPr lang="en-US" sz="1000" dirty="0"/>
           </a:p>
@@ -19839,7 +17036,7 @@
                   <a:srgbClr val="64748B"/>
                 </a:solidFill>
               </a:rPr>
-              <a:t>4  /  14</a:t>
+              <a:t>4  /  13</a:t>
             </a:r>
             <a:endParaRPr lang="en-US" sz="1000" dirty="0"/>
           </a:p>
@@ -22618,7 +19815,7 @@
                   <a:srgbClr val="64748B"/>
                 </a:solidFill>
               </a:rPr>
-              <a:t>5  /  14</a:t>
+              <a:t>5  /  13</a:t>
             </a:r>
             <a:endParaRPr lang="en-US" sz="1000" dirty="0"/>
           </a:p>
@@ -24147,7 +21344,7 @@
                   <a:srgbClr val="64748B"/>
                 </a:solidFill>
               </a:rPr>
-              <a:t>6  /  14</a:t>
+              <a:t>6  /  13</a:t>
             </a:r>
             <a:endParaRPr lang="en-US" sz="1000" dirty="0"/>
           </a:p>
@@ -25060,7 +22257,7 @@
                   <a:srgbClr val="64748B"/>
                 </a:solidFill>
               </a:rPr>
-              <a:t>7  /  14</a:t>
+              <a:t>7  /  13</a:t>
             </a:r>
             <a:endParaRPr lang="en-US" sz="1000" dirty="0"/>
           </a:p>

--- a/5조_발표자료.pptx
+++ b/5조_발표자료.pptx
@@ -542,46 +542,6 @@
           <a:bodyPr/>
           <a:lstStyle/>
           <a:p>
-            <a:r>
-              <a:rPr lang="en-US" dirty="0" err="1"/>
-              <a:t>Apiori</a:t>
-            </a:r>
-            <a:r>
-              <a:rPr lang="en-US" dirty="0"/>
-              <a:t> </a:t>
-            </a:r>
-            <a:r>
-              <a:rPr lang="ko-KR" altLang="en-US" dirty="0"/>
-              <a:t>의 분석결과인 지지도</a:t>
-            </a:r>
-            <a:r>
-              <a:rPr lang="en-US" altLang="ko-KR" dirty="0"/>
-              <a:t>, </a:t>
-            </a:r>
-            <a:r>
-              <a:rPr lang="ko-KR" altLang="en-US" dirty="0"/>
-              <a:t>신뢰도</a:t>
-            </a:r>
-            <a:r>
-              <a:rPr lang="en-US" altLang="ko-KR" dirty="0"/>
-              <a:t>, </a:t>
-            </a:r>
-            <a:r>
-              <a:rPr lang="ko-KR" altLang="en-US" dirty="0"/>
-              <a:t>향상도를 기반으로 추천해줄 </a:t>
-            </a:r>
-            <a:r>
-              <a:rPr lang="en-US" altLang="ko-KR" dirty="0"/>
-              <a:t>PDF </a:t>
-            </a:r>
-            <a:r>
-              <a:rPr lang="ko-KR" altLang="en-US" dirty="0"/>
-              <a:t>를 선별합니다</a:t>
-            </a:r>
-            <a:r>
-              <a:rPr lang="en-US" altLang="ko-KR" dirty="0"/>
-              <a:t>.</a:t>
-            </a:r>
             <a:endParaRPr lang="en-US" dirty="0"/>
           </a:p>
         </p:txBody>
@@ -4342,7 +4302,7 @@
                   </a:schemeClr>
                 </a:solidFill>
               </a:rPr>
-              <a:t>PDF </a:t>
+              <a:t>TF-IDF </a:t>
             </a:r>
             <a:r>
               <a:rPr lang="ko-KR" altLang="en-US" sz="1400" dirty="0">
@@ -4352,47 +4312,7 @@
                   </a:schemeClr>
                 </a:solidFill>
               </a:rPr>
-              <a:t>문서들의 어근과 본문 내용 어근에</a:t>
-            </a:r>
-            <a:endParaRPr lang="en-US" altLang="ko-KR" sz="1400" dirty="0">
-              <a:solidFill>
-                <a:schemeClr val="bg2">
-                  <a:lumMod val="25000"/>
-                </a:schemeClr>
-              </a:solidFill>
-            </a:endParaRPr>
-          </a:p>
-          <a:p>
-            <a:pPr algn="ctr"/>
-            <a:r>
-              <a:rPr lang="en-US" altLang="ko-KR" sz="1400" dirty="0" err="1">
-                <a:solidFill>
-                  <a:schemeClr val="bg2">
-                    <a:lumMod val="25000"/>
-                  </a:schemeClr>
-                </a:solidFill>
-              </a:rPr>
-              <a:t>Apriori</a:t>
-            </a:r>
-            <a:r>
-              <a:rPr lang="en-US" altLang="ko-KR" sz="1400" dirty="0">
-                <a:solidFill>
-                  <a:schemeClr val="bg2">
-                    <a:lumMod val="25000"/>
-                  </a:schemeClr>
-                </a:solidFill>
-              </a:rPr>
-              <a:t> </a:t>
-            </a:r>
-            <a:r>
-              <a:rPr lang="ko-KR" altLang="en-US" sz="1400" dirty="0">
-                <a:solidFill>
-                  <a:schemeClr val="bg2">
-                    <a:lumMod val="25000"/>
-                  </a:schemeClr>
-                </a:solidFill>
-              </a:rPr>
-              <a:t>연관분석 적용</a:t>
+              <a:t>코사인 유사도 기반 추천</a:t>
             </a:r>
             <a:endParaRPr lang="en-US" altLang="ko-KR" sz="1400" dirty="0">
               <a:solidFill>
